--- a/08-materiais/modelos/deck-programa.pptx
+++ b/08-materiais/modelos/deck-programa.pptx
@@ -13,9 +13,11 @@
     <p:sldId id="261" r:id="rId7"/>
     <p:sldId id="262" r:id="rId8"/>
     <p:sldId id="263" r:id="rId9"/>
+    <p:sldId id="264" r:id="rId10"/>
+    <p:sldId id="265" r:id="rId11"/>
   </p:sldIdLst>
   <p:notesMasterIdLst>
-    <p:notesMasterId r:id="rId10"/>
+    <p:notesMasterId r:id="rId12"/>
   </p:notesMasterIdLst>
   <p:sldSz cx="12188952" cy="6858000"/>
   <p:notesSz cx="6858000" cy="12188952"/>
@@ -551,6 +553,94 @@
 </p:notes>
 </file>
 
+<file path=ppt/notesSlides/notesSlide10.xml><?xml version="1.0" encoding="utf-8"?>
+<p:notes xmlns:a="http://schemas.openxmlformats.org/drawingml/2006/main" xmlns:r="http://schemas.openxmlformats.org/officeDocument/2006/relationships" xmlns:p="http://schemas.openxmlformats.org/presentationml/2006/main">
+  <p:cSld>
+    <p:spTree>
+      <p:nvGrpSpPr>
+        <p:cNvPr id="1" name=""/>
+        <p:cNvGrpSpPr/>
+        <p:nvPr/>
+      </p:nvGrpSpPr>
+      <p:grpSpPr>
+        <a:xfrm>
+          <a:off x="0" y="0"/>
+          <a:ext cx="0" cy="0"/>
+          <a:chOff x="0" y="0"/>
+          <a:chExt cx="0" cy="0"/>
+        </a:xfrm>
+      </p:grpSpPr>
+      <p:sp>
+        <p:nvSpPr>
+          <p:cNvPr id="2" name="Slide Image Placeholder 1"/>
+          <p:cNvSpPr>
+            <a:spLocks noGrp="1" noRot="1" noChangeAspect="1"/>
+          </p:cNvSpPr>
+          <p:nvPr>
+            <p:ph type="sldImg"/>
+          </p:nvPr>
+        </p:nvSpPr>
+        <p:spPr/>
+      </p:sp>
+      <p:sp>
+        <p:nvSpPr>
+          <p:cNvPr id="3" name="Notes Placeholder 2"/>
+          <p:cNvSpPr>
+            <a:spLocks noGrp="1"/>
+          </p:cNvSpPr>
+          <p:nvPr>
+            <p:ph type="body" idx="1"/>
+          </p:nvPr>
+        </p:nvSpPr>
+        <p:spPr/>
+        <p:txBody>
+          <a:bodyPr/>
+          <a:lstStyle/>
+          <a:p>
+            <a:r>
+              <a:rPr lang="en-US" dirty="0"/>
+              <a:t/>
+            </a:r>
+            <a:endParaRPr lang="en-US" dirty="0"/>
+          </a:p>
+        </p:txBody>
+      </p:sp>
+      <p:sp>
+        <p:nvSpPr>
+          <p:cNvPr id="4" name="Slide Number Placeholder 3"/>
+          <p:cNvSpPr>
+            <a:spLocks noGrp="1"/>
+          </p:cNvSpPr>
+          <p:nvPr>
+            <p:ph type="sldNum" sz="quarter" idx="10"/>
+          </p:nvPr>
+        </p:nvSpPr>
+        <p:spPr/>
+        <p:txBody>
+          <a:bodyPr/>
+          <a:lstStyle/>
+          <a:p>
+            <a:fld id="{F7021451-1387-4CA6-816F-3879F97B5CBC}" type="slidenum">
+              <a:rPr lang="en-US"/>
+              <a:t>10</a:t>
+            </a:fld>
+            <a:endParaRPr lang="en-US"/>
+          </a:p>
+        </p:txBody>
+      </p:sp>
+    </p:spTree>
+    <p:extLst>
+      <p:ext uri="{BB962C8B-B14F-4D97-AF65-F5344CB8AC3E}">
+        <p14:creationId xmlns:p14="http://schemas.microsoft.com/office/powerpoint/2010/main" val="1024086991"/>
+      </p:ext>
+    </p:extLst>
+  </p:cSld>
+  <p:clrMapOvr>
+    <a:masterClrMapping/>
+  </p:clrMapOvr>
+</p:notes>
+</file>
+
 <file path=ppt/notesSlides/notesSlide2.xml><?xml version="1.0" encoding="utf-8"?>
 <p:notes xmlns:a="http://schemas.openxmlformats.org/drawingml/2006/main" xmlns:r="http://schemas.openxmlformats.org/officeDocument/2006/relationships" xmlns:p="http://schemas.openxmlformats.org/presentationml/2006/main">
   <p:cSld>
@@ -1149,6 +1239,94 @@
             <a:fld id="{F7021451-1387-4CA6-816F-3879F97B5CBC}" type="slidenum">
               <a:rPr lang="en-US"/>
               <a:t>8</a:t>
+            </a:fld>
+            <a:endParaRPr lang="en-US"/>
+          </a:p>
+        </p:txBody>
+      </p:sp>
+    </p:spTree>
+    <p:extLst>
+      <p:ext uri="{BB962C8B-B14F-4D97-AF65-F5344CB8AC3E}">
+        <p14:creationId xmlns:p14="http://schemas.microsoft.com/office/powerpoint/2010/main" val="1024086991"/>
+      </p:ext>
+    </p:extLst>
+  </p:cSld>
+  <p:clrMapOvr>
+    <a:masterClrMapping/>
+  </p:clrMapOvr>
+</p:notes>
+</file>
+
+<file path=ppt/notesSlides/notesSlide9.xml><?xml version="1.0" encoding="utf-8"?>
+<p:notes xmlns:a="http://schemas.openxmlformats.org/drawingml/2006/main" xmlns:r="http://schemas.openxmlformats.org/officeDocument/2006/relationships" xmlns:p="http://schemas.openxmlformats.org/presentationml/2006/main">
+  <p:cSld>
+    <p:spTree>
+      <p:nvGrpSpPr>
+        <p:cNvPr id="1" name=""/>
+        <p:cNvGrpSpPr/>
+        <p:nvPr/>
+      </p:nvGrpSpPr>
+      <p:grpSpPr>
+        <a:xfrm>
+          <a:off x="0" y="0"/>
+          <a:ext cx="0" cy="0"/>
+          <a:chOff x="0" y="0"/>
+          <a:chExt cx="0" cy="0"/>
+        </a:xfrm>
+      </p:grpSpPr>
+      <p:sp>
+        <p:nvSpPr>
+          <p:cNvPr id="2" name="Slide Image Placeholder 1"/>
+          <p:cNvSpPr>
+            <a:spLocks noGrp="1" noRot="1" noChangeAspect="1"/>
+          </p:cNvSpPr>
+          <p:nvPr>
+            <p:ph type="sldImg"/>
+          </p:nvPr>
+        </p:nvSpPr>
+        <p:spPr/>
+      </p:sp>
+      <p:sp>
+        <p:nvSpPr>
+          <p:cNvPr id="3" name="Notes Placeholder 2"/>
+          <p:cNvSpPr>
+            <a:spLocks noGrp="1"/>
+          </p:cNvSpPr>
+          <p:nvPr>
+            <p:ph type="body" idx="1"/>
+          </p:nvPr>
+        </p:nvSpPr>
+        <p:spPr/>
+        <p:txBody>
+          <a:bodyPr/>
+          <a:lstStyle/>
+          <a:p>
+            <a:r>
+              <a:rPr lang="en-US" dirty="0"/>
+              <a:t/>
+            </a:r>
+            <a:endParaRPr lang="en-US" dirty="0"/>
+          </a:p>
+        </p:txBody>
+      </p:sp>
+      <p:sp>
+        <p:nvSpPr>
+          <p:cNvPr id="4" name="Slide Number Placeholder 3"/>
+          <p:cNvSpPr>
+            <a:spLocks noGrp="1"/>
+          </p:cNvSpPr>
+          <p:nvPr>
+            <p:ph type="sldNum" sz="quarter" idx="10"/>
+          </p:nvPr>
+        </p:nvSpPr>
+        <p:spPr/>
+        <p:txBody>
+          <a:bodyPr/>
+          <a:lstStyle/>
+          <a:p>
+            <a:fld id="{F7021451-1387-4CA6-816F-3879F97B5CBC}" type="slidenum">
+              <a:rPr lang="en-US"/>
+              <a:t>9</a:t>
             </a:fld>
             <a:endParaRPr lang="en-US"/>
           </a:p>
@@ -1652,9 +1830,616 @@
                 <a:ea typeface="Cambria" pitchFamily="34" charset="-122"/>
                 <a:cs typeface="Cambria" pitchFamily="34" charset="-120"/>
               </a:rPr>
-              <a:t>A decisão do ano é tomada uma vez — o risco, nunca: cada fase termina num portão onde a decisão volta para a sua mão.</a:t>
+              <a:t>A decisão do ano é tomada uma vez. O risco, nunca: cada fase termina num portão onde a decisão volta para a sua mão.</a:t>
             </a:r>
             <a:endParaRPr lang="en-US" sz="1700" dirty="0"/>
+          </a:p>
+        </p:txBody>
+      </p:sp>
+    </p:spTree>
+  </p:cSld>
+  <p:clrMapOvr>
+    <a:masterClrMapping/>
+  </p:clrMapOvr>
+</p:sld>
+</file>
+
+<file path=ppt/slides/slide10.xml><?xml version="1.0" encoding="utf-8"?>
+<p:sld xmlns:a="http://schemas.openxmlformats.org/drawingml/2006/main" xmlns:r="http://schemas.openxmlformats.org/officeDocument/2006/relationships" xmlns:p="http://schemas.openxmlformats.org/presentationml/2006/main">
+  <p:cSld name="Slide 10">
+    <p:bg>
+      <p:bgPr>
+        <a:solidFill>
+          <a:srgbClr val="FFFFFF"/>
+        </a:solidFill>
+      </p:bgPr>
+    </p:bg>
+    <p:spTree>
+      <p:nvGrpSpPr>
+        <p:cNvPr id="1" name=""/>
+        <p:cNvGrpSpPr/>
+        <p:nvPr/>
+      </p:nvGrpSpPr>
+      <p:grpSpPr>
+        <a:xfrm>
+          <a:off x="0" y="0"/>
+          <a:ext cx="0" cy="0"/>
+          <a:chOff x="0" y="0"/>
+          <a:chExt cx="0" cy="0"/>
+        </a:xfrm>
+      </p:grpSpPr>
+      <p:sp>
+        <p:nvSpPr>
+          <p:cNvPr id="2" name="Text 0"/>
+          <p:cNvSpPr/>
+          <p:nvPr/>
+        </p:nvSpPr>
+        <p:spPr>
+          <a:xfrm>
+            <a:off x="822960" y="594360"/>
+            <a:ext cx="5486400" cy="292608"/>
+          </a:xfrm>
+          <a:prstGeom prst="rect">
+            <a:avLst/>
+          </a:prstGeom>
+          <a:noFill/>
+          <a:ln/>
+        </p:spPr>
+        <p:txBody>
+          <a:bodyPr wrap="square" rtlCol="0" anchor="ctr"/>
+          <a:lstStyle/>
+          <a:p>
+            <a:pPr algn="l" indent="0" marL="0">
+              <a:buNone/>
+            </a:pPr>
+            <a:r>
+              <a:rPr lang="en-US" sz="1100" b="1" spc="300" kern="0" dirty="0">
+                <a:solidFill>
+                  <a:srgbClr val="C2A35B"/>
+                </a:solidFill>
+                <a:latin typeface="Calibri" pitchFamily="34" charset="0"/>
+                <a:ea typeface="Calibri" pitchFamily="34" charset="-122"/>
+                <a:cs typeface="Calibri" pitchFamily="34" charset="-120"/>
+              </a:rPr>
+              <a:t>NO FIM</a:t>
+            </a:r>
+            <a:endParaRPr lang="en-US" sz="1100" dirty="0"/>
+          </a:p>
+        </p:txBody>
+      </p:sp>
+      <p:sp>
+        <p:nvSpPr>
+          <p:cNvPr id="3" name="Text 1"/>
+          <p:cNvSpPr/>
+          <p:nvPr/>
+        </p:nvSpPr>
+        <p:spPr>
+          <a:xfrm>
+            <a:off x="822960" y="960120"/>
+            <a:ext cx="10543032" cy="914400"/>
+          </a:xfrm>
+          <a:prstGeom prst="rect">
+            <a:avLst/>
+          </a:prstGeom>
+          <a:noFill/>
+          <a:ln/>
+        </p:spPr>
+        <p:txBody>
+          <a:bodyPr wrap="square" rtlCol="0" anchor="ctr"/>
+          <a:lstStyle/>
+          <a:p>
+            <a:pPr indent="0" marL="0">
+              <a:lnSpc>
+                <a:spcPts val="3300"/>
+              </a:lnSpc>
+              <a:buNone/>
+            </a:pPr>
+            <a:r>
+              <a:rPr lang="en-US" sz="2700" b="1" dirty="0">
+                <a:solidFill>
+                  <a:srgbClr val="1B2A4A"/>
+                </a:solidFill>
+                <a:latin typeface="Cambria" pitchFamily="34" charset="0"/>
+                <a:ea typeface="Cambria" pitchFamily="34" charset="-122"/>
+                <a:cs typeface="Cambria" pitchFamily="34" charset="-120"/>
+              </a:rPr>
+              <a:t>O que fica com você</a:t>
+            </a:r>
+            <a:endParaRPr lang="en-US" sz="2700" dirty="0"/>
+          </a:p>
+        </p:txBody>
+      </p:sp>
+      <p:sp>
+        <p:nvSpPr>
+          <p:cNvPr id="4" name="Text 2"/>
+          <p:cNvSpPr/>
+          <p:nvPr/>
+        </p:nvSpPr>
+        <p:spPr>
+          <a:xfrm>
+            <a:off x="822960" y="6400800"/>
+            <a:ext cx="10543032" cy="274320"/>
+          </a:xfrm>
+          <a:prstGeom prst="rect">
+            <a:avLst/>
+          </a:prstGeom>
+          <a:noFill/>
+          <a:ln/>
+        </p:spPr>
+        <p:txBody>
+          <a:bodyPr wrap="square" rtlCol="0" anchor="ctr"/>
+          <a:lstStyle/>
+          <a:p>
+            <a:pPr algn="ctr" indent="0" marL="0">
+              <a:buNone/>
+            </a:pPr>
+            <a:r>
+              <a:rPr lang="en-US" sz="900" spc="100" kern="0" dirty="0">
+                <a:solidFill>
+                  <a:srgbClr val="6E6858"/>
+                </a:solidFill>
+                <a:latin typeface="Calibri" pitchFamily="34" charset="0"/>
+                <a:ea typeface="Calibri" pitchFamily="34" charset="-122"/>
+                <a:cs typeface="Calibri" pitchFamily="34" charset="-120"/>
+              </a:rPr>
+              <a:t>ABBA Consultoria de IA · contato@abbaservices.com.br</a:t>
+            </a:r>
+            <a:endParaRPr lang="en-US" sz="900" dirty="0"/>
+          </a:p>
+        </p:txBody>
+      </p:sp>
+      <p:sp>
+        <p:nvSpPr>
+          <p:cNvPr id="5" name="Shape 3"/>
+          <p:cNvSpPr/>
+          <p:nvPr/>
+        </p:nvSpPr>
+        <p:spPr>
+          <a:xfrm>
+            <a:off x="822960" y="2057400"/>
+            <a:ext cx="10543032" cy="0"/>
+          </a:xfrm>
+          <a:prstGeom prst="line">
+            <a:avLst/>
+          </a:prstGeom>
+          <a:noFill/>
+          <a:ln w="9525">
+            <a:solidFill>
+              <a:srgbClr val="E5E0D4"/>
+            </a:solidFill>
+            <a:prstDash val="solid"/>
+          </a:ln>
+        </p:spPr>
+      </p:sp>
+      <p:sp>
+        <p:nvSpPr>
+          <p:cNvPr id="6" name="Text 4"/>
+          <p:cNvSpPr/>
+          <p:nvPr/>
+        </p:nvSpPr>
+        <p:spPr>
+          <a:xfrm>
+            <a:off x="822960" y="2167128"/>
+            <a:ext cx="2377440" cy="292608"/>
+          </a:xfrm>
+          <a:prstGeom prst="rect">
+            <a:avLst/>
+          </a:prstGeom>
+          <a:noFill/>
+          <a:ln/>
+        </p:spPr>
+        <p:txBody>
+          <a:bodyPr wrap="square" rtlCol="0" anchor="ctr"/>
+          <a:lstStyle/>
+          <a:p>
+            <a:pPr algn="l" indent="0" marL="0">
+              <a:buNone/>
+            </a:pPr>
+            <a:r>
+              <a:rPr lang="en-US" sz="1050" b="1" spc="300" kern="0" dirty="0">
+                <a:solidFill>
+                  <a:srgbClr val="C2A35B"/>
+                </a:solidFill>
+                <a:latin typeface="Calibri" pitchFamily="34" charset="0"/>
+                <a:ea typeface="Calibri" pitchFamily="34" charset="-122"/>
+                <a:cs typeface="Calibri" pitchFamily="34" charset="-120"/>
+              </a:rPr>
+              <a:t>OS SISTEMAS</a:t>
+            </a:r>
+            <a:endParaRPr lang="en-US" sz="1050" dirty="0"/>
+          </a:p>
+        </p:txBody>
+      </p:sp>
+      <p:sp>
+        <p:nvSpPr>
+          <p:cNvPr id="7" name="Text 5"/>
+          <p:cNvSpPr/>
+          <p:nvPr/>
+        </p:nvSpPr>
+        <p:spPr>
+          <a:xfrm>
+            <a:off x="3383280" y="2148840"/>
+            <a:ext cx="7982712" cy="777240"/>
+          </a:xfrm>
+          <a:prstGeom prst="rect">
+            <a:avLst/>
+          </a:prstGeom>
+          <a:noFill/>
+          <a:ln/>
+        </p:spPr>
+        <p:txBody>
+          <a:bodyPr wrap="square" rtlCol="0" anchor="ctr"/>
+          <a:lstStyle/>
+          <a:p>
+            <a:pPr algn="l" indent="0" marL="0">
+              <a:lnSpc>
+                <a:spcPts val="1900"/>
+              </a:lnSpc>
+              <a:buNone/>
+            </a:pPr>
+            <a:r>
+              <a:rPr lang="en-US" sz="1300" dirty="0">
+                <a:solidFill>
+                  <a:srgbClr val="33394A"/>
+                </a:solidFill>
+                <a:latin typeface="Calibri" pitchFamily="34" charset="0"/>
+                <a:ea typeface="Calibri" pitchFamily="34" charset="-122"/>
+                <a:cs typeface="Calibri" pitchFamily="34" charset="-120"/>
+              </a:rPr>
+              <a:t>em produção, documentados, com aprovação humana nos pontos certos. Propriedade sua.</a:t>
+            </a:r>
+            <a:endParaRPr lang="en-US" sz="1300" dirty="0"/>
+          </a:p>
+        </p:txBody>
+      </p:sp>
+      <p:sp>
+        <p:nvSpPr>
+          <p:cNvPr id="8" name="Shape 6"/>
+          <p:cNvSpPr/>
+          <p:nvPr/>
+        </p:nvSpPr>
+        <p:spPr>
+          <a:xfrm>
+            <a:off x="822960" y="3044952"/>
+            <a:ext cx="10543032" cy="0"/>
+          </a:xfrm>
+          <a:prstGeom prst="line">
+            <a:avLst/>
+          </a:prstGeom>
+          <a:noFill/>
+          <a:ln w="9525">
+            <a:solidFill>
+              <a:srgbClr val="E5E0D4"/>
+            </a:solidFill>
+            <a:prstDash val="solid"/>
+          </a:ln>
+        </p:spPr>
+      </p:sp>
+      <p:sp>
+        <p:nvSpPr>
+          <p:cNvPr id="9" name="Text 7"/>
+          <p:cNvSpPr/>
+          <p:nvPr/>
+        </p:nvSpPr>
+        <p:spPr>
+          <a:xfrm>
+            <a:off x="822960" y="3154680"/>
+            <a:ext cx="2377440" cy="292608"/>
+          </a:xfrm>
+          <a:prstGeom prst="rect">
+            <a:avLst/>
+          </a:prstGeom>
+          <a:noFill/>
+          <a:ln/>
+        </p:spPr>
+        <p:txBody>
+          <a:bodyPr wrap="square" rtlCol="0" anchor="ctr"/>
+          <a:lstStyle/>
+          <a:p>
+            <a:pPr algn="l" indent="0" marL="0">
+              <a:buNone/>
+            </a:pPr>
+            <a:r>
+              <a:rPr lang="en-US" sz="1050" b="1" spc="300" kern="0" dirty="0">
+                <a:solidFill>
+                  <a:srgbClr val="C2A35B"/>
+                </a:solidFill>
+                <a:latin typeface="Calibri" pitchFamily="34" charset="0"/>
+                <a:ea typeface="Calibri" pitchFamily="34" charset="-122"/>
+                <a:cs typeface="Calibri" pitchFamily="34" charset="-120"/>
+              </a:rPr>
+              <a:t>AS PESSOAS</a:t>
+            </a:r>
+            <a:endParaRPr lang="en-US" sz="1050" dirty="0"/>
+          </a:p>
+        </p:txBody>
+      </p:sp>
+      <p:sp>
+        <p:nvSpPr>
+          <p:cNvPr id="10" name="Text 8"/>
+          <p:cNvSpPr/>
+          <p:nvPr/>
+        </p:nvSpPr>
+        <p:spPr>
+          <a:xfrm>
+            <a:off x="3383280" y="3136392"/>
+            <a:ext cx="7982712" cy="777240"/>
+          </a:xfrm>
+          <a:prstGeom prst="rect">
+            <a:avLst/>
+          </a:prstGeom>
+          <a:noFill/>
+          <a:ln/>
+        </p:spPr>
+        <p:txBody>
+          <a:bodyPr wrap="square" rtlCol="0" anchor="ctr"/>
+          <a:lstStyle/>
+          <a:p>
+            <a:pPr algn="l" indent="0" marL="0">
+              <a:lnSpc>
+                <a:spcPts val="1900"/>
+              </a:lnSpc>
+              <a:buNone/>
+            </a:pPr>
+            <a:r>
+              <a:rPr lang="en-US" sz="1300" dirty="0">
+                <a:solidFill>
+                  <a:srgbClr val="33394A"/>
+                </a:solidFill>
+                <a:latin typeface="Calibri" pitchFamily="34" charset="0"/>
+                <a:ea typeface="Calibri" pitchFamily="34" charset="-122"/>
+                <a:cs typeface="Calibri" pitchFamily="34" charset="-120"/>
+              </a:rPr>
+              <a:t>formadas em turma própria, com fluência medida. E um dono interno para cada peça.</a:t>
+            </a:r>
+            <a:endParaRPr lang="en-US" sz="1300" dirty="0"/>
+          </a:p>
+        </p:txBody>
+      </p:sp>
+      <p:sp>
+        <p:nvSpPr>
+          <p:cNvPr id="11" name="Shape 9"/>
+          <p:cNvSpPr/>
+          <p:nvPr/>
+        </p:nvSpPr>
+        <p:spPr>
+          <a:xfrm>
+            <a:off x="822960" y="4032504"/>
+            <a:ext cx="10543032" cy="0"/>
+          </a:xfrm>
+          <a:prstGeom prst="line">
+            <a:avLst/>
+          </a:prstGeom>
+          <a:noFill/>
+          <a:ln w="9525">
+            <a:solidFill>
+              <a:srgbClr val="E5E0D4"/>
+            </a:solidFill>
+            <a:prstDash val="solid"/>
+          </a:ln>
+        </p:spPr>
+      </p:sp>
+      <p:sp>
+        <p:nvSpPr>
+          <p:cNvPr id="12" name="Text 10"/>
+          <p:cNvSpPr/>
+          <p:nvPr/>
+        </p:nvSpPr>
+        <p:spPr>
+          <a:xfrm>
+            <a:off x="822960" y="4142232"/>
+            <a:ext cx="2377440" cy="292608"/>
+          </a:xfrm>
+          <a:prstGeom prst="rect">
+            <a:avLst/>
+          </a:prstGeom>
+          <a:noFill/>
+          <a:ln/>
+        </p:spPr>
+        <p:txBody>
+          <a:bodyPr wrap="square" rtlCol="0" anchor="ctr"/>
+          <a:lstStyle/>
+          <a:p>
+            <a:pPr algn="l" indent="0" marL="0">
+              <a:buNone/>
+            </a:pPr>
+            <a:r>
+              <a:rPr lang="en-US" sz="1050" b="1" spc="300" kern="0" dirty="0">
+                <a:solidFill>
+                  <a:srgbClr val="C2A35B"/>
+                </a:solidFill>
+                <a:latin typeface="Calibri" pitchFamily="34" charset="0"/>
+                <a:ea typeface="Calibri" pitchFamily="34" charset="-122"/>
+                <a:cs typeface="Calibri" pitchFamily="34" charset="-120"/>
+              </a:rPr>
+              <a:t>O REGISTRO</a:t>
+            </a:r>
+            <a:endParaRPr lang="en-US" sz="1050" dirty="0"/>
+          </a:p>
+        </p:txBody>
+      </p:sp>
+      <p:sp>
+        <p:nvSpPr>
+          <p:cNvPr id="13" name="Text 11"/>
+          <p:cNvSpPr/>
+          <p:nvPr/>
+        </p:nvSpPr>
+        <p:spPr>
+          <a:xfrm>
+            <a:off x="3383280" y="4123944"/>
+            <a:ext cx="7982712" cy="777240"/>
+          </a:xfrm>
+          <a:prstGeom prst="rect">
+            <a:avLst/>
+          </a:prstGeom>
+          <a:noFill/>
+          <a:ln/>
+        </p:spPr>
+        <p:txBody>
+          <a:bodyPr wrap="square" rtlCol="0" anchor="ctr"/>
+          <a:lstStyle/>
+          <a:p>
+            <a:pPr algn="l" indent="0" marL="0">
+              <a:lnSpc>
+                <a:spcPts val="1900"/>
+              </a:lnSpc>
+              <a:buNone/>
+            </a:pPr>
+            <a:r>
+              <a:rPr lang="en-US" sz="1300" dirty="0">
+                <a:solidFill>
+                  <a:srgbClr val="33394A"/>
+                </a:solidFill>
+                <a:latin typeface="Calibri" pitchFamily="34" charset="0"/>
+                <a:ea typeface="Calibri" pitchFamily="34" charset="-122"/>
+                <a:cs typeface="Calibri" pitchFamily="34" charset="-120"/>
+              </a:rPr>
+              <a:t>cada decisão com o número combinado antes e o resultado medido depois, assinado por gente sua.</a:t>
+            </a:r>
+            <a:endParaRPr lang="en-US" sz="1300" dirty="0"/>
+          </a:p>
+        </p:txBody>
+      </p:sp>
+      <p:sp>
+        <p:nvSpPr>
+          <p:cNvPr id="14" name="Shape 12"/>
+          <p:cNvSpPr/>
+          <p:nvPr/>
+        </p:nvSpPr>
+        <p:spPr>
+          <a:xfrm>
+            <a:off x="822960" y="5020056"/>
+            <a:ext cx="10543032" cy="0"/>
+          </a:xfrm>
+          <a:prstGeom prst="line">
+            <a:avLst/>
+          </a:prstGeom>
+          <a:noFill/>
+          <a:ln w="9525">
+            <a:solidFill>
+              <a:srgbClr val="E5E0D4"/>
+            </a:solidFill>
+            <a:prstDash val="solid"/>
+          </a:ln>
+        </p:spPr>
+      </p:sp>
+      <p:sp>
+        <p:nvSpPr>
+          <p:cNvPr id="15" name="Text 13"/>
+          <p:cNvSpPr/>
+          <p:nvPr/>
+        </p:nvSpPr>
+        <p:spPr>
+          <a:xfrm>
+            <a:off x="822960" y="5129784"/>
+            <a:ext cx="2377440" cy="292608"/>
+          </a:xfrm>
+          <a:prstGeom prst="rect">
+            <a:avLst/>
+          </a:prstGeom>
+          <a:noFill/>
+          <a:ln/>
+        </p:spPr>
+        <p:txBody>
+          <a:bodyPr wrap="square" rtlCol="0" anchor="ctr"/>
+          <a:lstStyle/>
+          <a:p>
+            <a:pPr algn="l" indent="0" marL="0">
+              <a:buNone/>
+            </a:pPr>
+            <a:r>
+              <a:rPr lang="en-US" sz="1050" b="1" spc="300" kern="0" dirty="0">
+                <a:solidFill>
+                  <a:srgbClr val="C2A35B"/>
+                </a:solidFill>
+                <a:latin typeface="Calibri" pitchFamily="34" charset="0"/>
+                <a:ea typeface="Calibri" pitchFamily="34" charset="-122"/>
+                <a:cs typeface="Calibri" pitchFamily="34" charset="-120"/>
+              </a:rPr>
+              <a:t>A PROVA</a:t>
+            </a:r>
+            <a:endParaRPr lang="en-US" sz="1050" dirty="0"/>
+          </a:p>
+        </p:txBody>
+      </p:sp>
+      <p:sp>
+        <p:nvSpPr>
+          <p:cNvPr id="16" name="Text 14"/>
+          <p:cNvSpPr/>
+          <p:nvPr/>
+        </p:nvSpPr>
+        <p:spPr>
+          <a:xfrm>
+            <a:off x="3383280" y="5111496"/>
+            <a:ext cx="7982712" cy="777240"/>
+          </a:xfrm>
+          <a:prstGeom prst="rect">
+            <a:avLst/>
+          </a:prstGeom>
+          <a:noFill/>
+          <a:ln/>
+        </p:spPr>
+        <p:txBody>
+          <a:bodyPr wrap="square" rtlCol="0" anchor="ctr"/>
+          <a:lstStyle/>
+          <a:p>
+            <a:pPr algn="l" indent="0" marL="0">
+              <a:lnSpc>
+                <a:spcPts val="1900"/>
+              </a:lnSpc>
+              <a:buNone/>
+            </a:pPr>
+            <a:r>
+              <a:rPr lang="en-US" sz="1300" dirty="0">
+                <a:solidFill>
+                  <a:srgbClr val="33394A"/>
+                </a:solidFill>
+                <a:latin typeface="Calibri" pitchFamily="34" charset="0"/>
+                <a:ea typeface="Calibri" pitchFamily="34" charset="-122"/>
+                <a:cs typeface="Calibri" pitchFamily="34" charset="-120"/>
+              </a:rPr>
+              <a:t>não a nossa palavra: a série de projetado versus realizado do ano inteiro, pronta para a diretoria.</a:t>
+            </a:r>
+            <a:endParaRPr lang="en-US" sz="1300" dirty="0"/>
+          </a:p>
+        </p:txBody>
+      </p:sp>
+      <p:sp>
+        <p:nvSpPr>
+          <p:cNvPr id="17" name="Text 15"/>
+          <p:cNvSpPr/>
+          <p:nvPr/>
+        </p:nvSpPr>
+        <p:spPr>
+          <a:xfrm>
+            <a:off x="822960" y="6035040"/>
+            <a:ext cx="10543032" cy="457200"/>
+          </a:xfrm>
+          <a:prstGeom prst="rect">
+            <a:avLst/>
+          </a:prstGeom>
+          <a:noFill/>
+          <a:ln/>
+        </p:spPr>
+        <p:txBody>
+          <a:bodyPr wrap="square" rtlCol="0" anchor="ctr"/>
+          <a:lstStyle/>
+          <a:p>
+            <a:pPr algn="ctr" indent="0" marL="0">
+              <a:buNone/>
+            </a:pPr>
+            <a:r>
+              <a:rPr lang="en-US" sz="1500" b="1" dirty="0">
+                <a:solidFill>
+                  <a:srgbClr val="1B2A4A"/>
+                </a:solidFill>
+                <a:latin typeface="Cambria" pitchFamily="34" charset="0"/>
+                <a:ea typeface="Cambria" pitchFamily="34" charset="-122"/>
+                <a:cs typeface="Cambria" pitchFamily="34" charset="-120"/>
+              </a:rPr>
+              <a:t>O próximo passo não custa nada: o Mapa de Vazamento da sua operação.</a:t>
+            </a:r>
+            <a:endParaRPr lang="en-US" sz="1500" dirty="0"/>
           </a:p>
         </p:txBody>
       </p:sp>
@@ -1765,7 +2550,7 @@
                 <a:ea typeface="Cambria" pitchFamily="34" charset="-122"/>
                 <a:cs typeface="Cambria" pitchFamily="34" charset="-120"/>
               </a:rPr>
-              <a:t>Tudo começa com o Mapa de Vazamento — grátis.</a:t>
+              <a:t>Tudo começa com o Mapa de Vazamento. Grátis.</a:t>
             </a:r>
             <a:endParaRPr lang="en-US" sz="2700" dirty="0"/>
           </a:p>
@@ -1954,7 +2739,7 @@
                 <a:ea typeface="Calibri" pitchFamily="34" charset="-122"/>
                 <a:cs typeface="Calibri" pitchFamily="34" charset="-120"/>
               </a:rPr>
-              <a:t>O Mapa é a porta única da ABBA. Ele existe para uma decisão: vale ou não vale abrir o Programa? Se o número não convencer, a conversa termina ali — sem custo e sem compromisso.</a:t>
+              <a:t>O Mapa é a porta única da ABBA. Ele existe para uma decisão: vale ou não vale abrir o Programa? Se o número não convencer, a conversa termina ali. Sem custo e sem compromisso.</a:t>
             </a:r>
             <a:endParaRPr lang="en-US" sz="1350" dirty="0"/>
           </a:p>
@@ -1983,7 +2768,7 @@
                 <a:ea typeface="Calibri" pitchFamily="34" charset="-122"/>
                 <a:cs typeface="Calibri" pitchFamily="34" charset="-120"/>
               </a:rPr>
-              <a:t>Se convencer, o Termo do Programa é assinado uma vez, com as três fases dentro: a fase 1 firme, e as fases 2 e 3 já precificadas como opção sua — condicionada ao Portão da Prova.</a:t>
+              <a:t>Se convencer, o Termo do Programa é assinado uma vez, com as três fases dentro: a fase 1 firme, e as fases 2 e 3 já precificadas como opção sua, condicionada ao Portão da Prova. Provar valor em semanas, com dinheiro pequeno, antes de comprometer dinheiro grande.</a:t>
             </a:r>
             <a:endParaRPr lang="en-US" sz="1350" dirty="0"/>
           </a:p>
@@ -2054,7 +2839,7 @@
                 <a:ea typeface="Calibri" pitchFamily="34" charset="-122"/>
                 <a:cs typeface="Calibri" pitchFamily="34" charset="-120"/>
               </a:rPr>
-              <a:t>FASE 1 · A PROVA — SEIS SEMANAS</a:t>
+              <a:t>O SISTEMA POR DENTRO</a:t>
             </a:r>
             <a:endParaRPr lang="en-US" sz="1100" dirty="0"/>
           </a:p>
@@ -2096,7 +2881,7 @@
                 <a:ea typeface="Cambria" pitchFamily="34" charset="-122"/>
                 <a:cs typeface="Cambria" pitchFamily="34" charset="-120"/>
               </a:rPr>
-              <a:t>Um caso construído, rodando e medido. E o retrato inteiro.</a:t>
+              <a:t>O que acontece em cada fase, e por quê.</a:t>
             </a:r>
             <a:endParaRPr lang="en-US" sz="2700" dirty="0"/>
           </a:p>
@@ -2111,7 +2896,7 @@
         <p:spPr>
           <a:xfrm>
             <a:off x="822960" y="1920240"/>
-            <a:ext cx="7251192" cy="822960"/>
+            <a:ext cx="10543032" cy="822960"/>
           </a:xfrm>
           <a:prstGeom prst="rect">
             <a:avLst/>
@@ -2138,7 +2923,7 @@
                 <a:ea typeface="Calibri" pitchFamily="34" charset="-122"/>
                 <a:cs typeface="Calibri" pitchFamily="34" charset="-120"/>
               </a:rPr>
-              <a:t>A métrica é combinada por escrito na primeira semana. Ao fim, o número está na mesa — e a decisão é sua.</a:t>
+              <a:t>Cada capacidade que a ABBA opera tem lugar e hora dentro do Programa. Nada é vendido em separado: é assim que o sistema funciona.</a:t>
             </a:r>
             <a:endParaRPr lang="en-US" sz="1300" dirty="0"/>
           </a:p>
@@ -2183,40 +2968,117 @@
           </a:p>
         </p:txBody>
       </p:sp>
-      <p:pic>
-        <p:nvPicPr>
-          <p:cNvPr id="6" name="Image 0" descr="/home/user/abba-ops/08-materiais/assets/fotos/prototipo--relatorio-gono-go.jpg">    </p:cNvPr>
-          <p:cNvPicPr>
-            <a:picLocks noChangeAspect="1"/>
-          </p:cNvPicPr>
-          <p:nvPr/>
-        </p:nvPicPr>
-        <p:blipFill>
-          <a:blip r:embed="rId1"/>
-          <a:stretch>
-            <a:fillRect/>
-          </a:stretch>
-        </p:blipFill>
-        <p:spPr>
-          <a:xfrm>
-            <a:off x="8650773" y="2331720"/>
-            <a:ext cx="2715219" cy="3840480"/>
-          </a:xfrm>
-          <a:prstGeom prst="rect">
-            <a:avLst/>
-          </a:prstGeom>
-        </p:spPr>
-      </p:pic>
-      <p:sp>
-        <p:nvSpPr>
-          <p:cNvPr id="7" name="Text 4"/>
-          <p:cNvSpPr/>
-          <p:nvPr/>
-        </p:nvSpPr>
-        <p:spPr>
-          <a:xfrm>
-            <a:off x="8650773" y="6217920"/>
-            <a:ext cx="2715219" cy="411480"/>
+      <p:sp>
+        <p:nvSpPr>
+          <p:cNvPr id="6" name="Shape 4"/>
+          <p:cNvSpPr/>
+          <p:nvPr/>
+        </p:nvSpPr>
+        <p:spPr>
+          <a:xfrm>
+            <a:off x="822960" y="2487168"/>
+            <a:ext cx="10543032" cy="0"/>
+          </a:xfrm>
+          <a:prstGeom prst="line">
+            <a:avLst/>
+          </a:prstGeom>
+          <a:noFill/>
+          <a:ln w="9525">
+            <a:solidFill>
+              <a:srgbClr val="E5E0D4"/>
+            </a:solidFill>
+            <a:prstDash val="solid"/>
+          </a:ln>
+        </p:spPr>
+      </p:sp>
+      <p:sp>
+        <p:nvSpPr>
+          <p:cNvPr id="7" name="Text 5"/>
+          <p:cNvSpPr/>
+          <p:nvPr/>
+        </p:nvSpPr>
+        <p:spPr>
+          <a:xfrm>
+            <a:off x="822960" y="2560320"/>
+            <a:ext cx="2331720" cy="292608"/>
+          </a:xfrm>
+          <a:prstGeom prst="rect">
+            <a:avLst/>
+          </a:prstGeom>
+          <a:noFill/>
+          <a:ln/>
+        </p:spPr>
+        <p:txBody>
+          <a:bodyPr wrap="square" rtlCol="0" anchor="ctr"/>
+          <a:lstStyle/>
+          <a:p>
+            <a:pPr algn="l" indent="0" marL="0">
+              <a:buNone/>
+            </a:pPr>
+            <a:r>
+              <a:rPr lang="en-US" sz="950" b="1" spc="300" kern="0" dirty="0">
+                <a:solidFill>
+                  <a:srgbClr val="C2A35B"/>
+                </a:solidFill>
+                <a:latin typeface="Calibri" pitchFamily="34" charset="0"/>
+                <a:ea typeface="Calibri" pitchFamily="34" charset="-122"/>
+                <a:cs typeface="Calibri" pitchFamily="34" charset="-120"/>
+              </a:rPr>
+              <a:t>AVALIAÇÃO PROFUNDA</a:t>
+            </a:r>
+            <a:endParaRPr lang="en-US" sz="950" dirty="0"/>
+          </a:p>
+        </p:txBody>
+      </p:sp>
+      <p:sp>
+        <p:nvSpPr>
+          <p:cNvPr id="8" name="Text 6"/>
+          <p:cNvSpPr/>
+          <p:nvPr/>
+        </p:nvSpPr>
+        <p:spPr>
+          <a:xfrm>
+            <a:off x="3246120" y="2542032"/>
+            <a:ext cx="1371600" cy="274320"/>
+          </a:xfrm>
+          <a:prstGeom prst="rect">
+            <a:avLst/>
+          </a:prstGeom>
+          <a:noFill/>
+          <a:ln/>
+        </p:spPr>
+        <p:txBody>
+          <a:bodyPr wrap="square" rtlCol="0" anchor="ctr"/>
+          <a:lstStyle/>
+          <a:p>
+            <a:pPr indent="0" marL="0">
+              <a:buNone/>
+            </a:pPr>
+            <a:r>
+              <a:rPr lang="en-US" sz="1050" i="1" dirty="0">
+                <a:solidFill>
+                  <a:srgbClr val="6E6858"/>
+                </a:solidFill>
+                <a:latin typeface="Cambria" pitchFamily="34" charset="0"/>
+                <a:ea typeface="Cambria" pitchFamily="34" charset="-122"/>
+                <a:cs typeface="Cambria" pitchFamily="34" charset="-120"/>
+              </a:rPr>
+              <a:t>Fase 1</a:t>
+            </a:r>
+            <a:endParaRPr lang="en-US" sz="1050" dirty="0"/>
+          </a:p>
+        </p:txBody>
+      </p:sp>
+      <p:sp>
+        <p:nvSpPr>
+          <p:cNvPr id="9" name="Text 7"/>
+          <p:cNvSpPr/>
+          <p:nvPr/>
+        </p:nvSpPr>
+        <p:spPr>
+          <a:xfrm>
+            <a:off x="4709160" y="2532888"/>
+            <a:ext cx="6656832" cy="603504"/>
           </a:xfrm>
           <a:prstGeom prst="rect">
             <a:avLst/>
@@ -2235,15 +3097,220 @@
               <a:buNone/>
             </a:pPr>
             <a:r>
-              <a:rPr lang="en-US" sz="950" i="1" dirty="0">
+              <a:rPr lang="en-US" sz="1000" dirty="0">
+                <a:solidFill>
+                  <a:srgbClr val="33394A"/>
+                </a:solidFill>
+                <a:latin typeface="Calibri" pitchFamily="34" charset="0"/>
+                <a:ea typeface="Calibri" pitchFamily="34" charset="-122"/>
+                <a:cs typeface="Calibri" pitchFamily="34" charset="-120"/>
+              </a:rPr>
+              <a:t>O mergulho do conselho à linha de frente: onde o dinheiro vaza, o que a empresa tem de base, quem vive cada processo. Sai o retrato completo de oportunidades, ranqueado por retorno e esforço.</a:t>
+            </a:r>
+            <a:endParaRPr lang="en-US" sz="1000" dirty="0"/>
+          </a:p>
+        </p:txBody>
+      </p:sp>
+      <p:sp>
+        <p:nvSpPr>
+          <p:cNvPr id="10" name="Shape 8"/>
+          <p:cNvSpPr/>
+          <p:nvPr/>
+        </p:nvSpPr>
+        <p:spPr>
+          <a:xfrm>
+            <a:off x="822960" y="3154680"/>
+            <a:ext cx="10543032" cy="0"/>
+          </a:xfrm>
+          <a:prstGeom prst="line">
+            <a:avLst/>
+          </a:prstGeom>
+          <a:noFill/>
+          <a:ln w="9525">
+            <a:solidFill>
+              <a:srgbClr val="E5E0D4"/>
+            </a:solidFill>
+            <a:prstDash val="solid"/>
+          </a:ln>
+        </p:spPr>
+      </p:sp>
+      <p:sp>
+        <p:nvSpPr>
+          <p:cNvPr id="11" name="Text 9"/>
+          <p:cNvSpPr/>
+          <p:nvPr/>
+        </p:nvSpPr>
+        <p:spPr>
+          <a:xfrm>
+            <a:off x="822960" y="3227832"/>
+            <a:ext cx="2331720" cy="292608"/>
+          </a:xfrm>
+          <a:prstGeom prst="rect">
+            <a:avLst/>
+          </a:prstGeom>
+          <a:noFill/>
+          <a:ln/>
+        </p:spPr>
+        <p:txBody>
+          <a:bodyPr wrap="square" rtlCol="0" anchor="ctr"/>
+          <a:lstStyle/>
+          <a:p>
+            <a:pPr algn="l" indent="0" marL="0">
+              <a:buNone/>
+            </a:pPr>
+            <a:r>
+              <a:rPr lang="en-US" sz="950" b="1" spc="300" kern="0" dirty="0">
+                <a:solidFill>
+                  <a:srgbClr val="C2A35B"/>
+                </a:solidFill>
+                <a:latin typeface="Calibri" pitchFamily="34" charset="0"/>
+                <a:ea typeface="Calibri" pitchFamily="34" charset="-122"/>
+                <a:cs typeface="Calibri" pitchFamily="34" charset="-120"/>
+              </a:rPr>
+              <a:t>PROTÓTIPO MEDIDO</a:t>
+            </a:r>
+            <a:endParaRPr lang="en-US" sz="950" dirty="0"/>
+          </a:p>
+        </p:txBody>
+      </p:sp>
+      <p:sp>
+        <p:nvSpPr>
+          <p:cNvPr id="12" name="Text 10"/>
+          <p:cNvSpPr/>
+          <p:nvPr/>
+        </p:nvSpPr>
+        <p:spPr>
+          <a:xfrm>
+            <a:off x="3246120" y="3209544"/>
+            <a:ext cx="1371600" cy="274320"/>
+          </a:xfrm>
+          <a:prstGeom prst="rect">
+            <a:avLst/>
+          </a:prstGeom>
+          <a:noFill/>
+          <a:ln/>
+        </p:spPr>
+        <p:txBody>
+          <a:bodyPr wrap="square" rtlCol="0" anchor="ctr"/>
+          <a:lstStyle/>
+          <a:p>
+            <a:pPr indent="0" marL="0">
+              <a:buNone/>
+            </a:pPr>
+            <a:r>
+              <a:rPr lang="en-US" sz="1050" i="1" dirty="0">
                 <a:solidFill>
                   <a:srgbClr val="6E6858"/>
                 </a:solidFill>
-                <a:latin typeface="Calibri" pitchFamily="34" charset="0"/>
-                <a:ea typeface="Calibri" pitchFamily="34" charset="-122"/>
-                <a:cs typeface="Calibri" pitchFamily="34" charset="-120"/>
-              </a:rPr>
-              <a:t>Relatório GO/NO-GO real de um protótipo (empresa preservada).</a:t>
+                <a:latin typeface="Cambria" pitchFamily="34" charset="0"/>
+                <a:ea typeface="Cambria" pitchFamily="34" charset="-122"/>
+                <a:cs typeface="Cambria" pitchFamily="34" charset="-120"/>
+              </a:rPr>
+              <a:t>Fase 1</a:t>
+            </a:r>
+            <a:endParaRPr lang="en-US" sz="1050" dirty="0"/>
+          </a:p>
+        </p:txBody>
+      </p:sp>
+      <p:sp>
+        <p:nvSpPr>
+          <p:cNvPr id="13" name="Text 11"/>
+          <p:cNvSpPr/>
+          <p:nvPr/>
+        </p:nvSpPr>
+        <p:spPr>
+          <a:xfrm>
+            <a:off x="4709160" y="3200400"/>
+            <a:ext cx="6656832" cy="603504"/>
+          </a:xfrm>
+          <a:prstGeom prst="rect">
+            <a:avLst/>
+          </a:prstGeom>
+          <a:noFill/>
+          <a:ln/>
+        </p:spPr>
+        <p:txBody>
+          <a:bodyPr wrap="square" rtlCol="0" anchor="ctr"/>
+          <a:lstStyle/>
+          <a:p>
+            <a:pPr algn="l" indent="0" marL="0">
+              <a:lnSpc>
+                <a:spcPts val="1300"/>
+              </a:lnSpc>
+              <a:buNone/>
+            </a:pPr>
+            <a:r>
+              <a:rPr lang="en-US" sz="1000" dirty="0">
+                <a:solidFill>
+                  <a:srgbClr val="33394A"/>
+                </a:solidFill>
+                <a:latin typeface="Calibri" pitchFamily="34" charset="0"/>
+                <a:ea typeface="Calibri" pitchFamily="34" charset="-122"/>
+                <a:cs typeface="Calibri" pitchFamily="34" charset="-120"/>
+              </a:rPr>
+              <a:t>O caso escolhido construído com os seus dados e posto em uso real, contra a métrica combinada por escrito na primeira semana. É a primeira parede da obra: é ela que paga a fundação do resto.</a:t>
+            </a:r>
+            <a:endParaRPr lang="en-US" sz="1000" dirty="0"/>
+          </a:p>
+        </p:txBody>
+      </p:sp>
+      <p:sp>
+        <p:nvSpPr>
+          <p:cNvPr id="14" name="Shape 12"/>
+          <p:cNvSpPr/>
+          <p:nvPr/>
+        </p:nvSpPr>
+        <p:spPr>
+          <a:xfrm>
+            <a:off x="822960" y="3822192"/>
+            <a:ext cx="10543032" cy="0"/>
+          </a:xfrm>
+          <a:prstGeom prst="line">
+            <a:avLst/>
+          </a:prstGeom>
+          <a:noFill/>
+          <a:ln w="9525">
+            <a:solidFill>
+              <a:srgbClr val="E5E0D4"/>
+            </a:solidFill>
+            <a:prstDash val="solid"/>
+          </a:ln>
+        </p:spPr>
+      </p:sp>
+      <p:sp>
+        <p:nvSpPr>
+          <p:cNvPr id="15" name="Text 13"/>
+          <p:cNvSpPr/>
+          <p:nvPr/>
+        </p:nvSpPr>
+        <p:spPr>
+          <a:xfrm>
+            <a:off x="822960" y="3895344"/>
+            <a:ext cx="2331720" cy="292608"/>
+          </a:xfrm>
+          <a:prstGeom prst="rect">
+            <a:avLst/>
+          </a:prstGeom>
+          <a:noFill/>
+          <a:ln/>
+        </p:spPr>
+        <p:txBody>
+          <a:bodyPr wrap="square" rtlCol="0" anchor="ctr"/>
+          <a:lstStyle/>
+          <a:p>
+            <a:pPr algn="l" indent="0" marL="0">
+              <a:buNone/>
+            </a:pPr>
+            <a:r>
+              <a:rPr lang="en-US" sz="950" b="1" spc="300" kern="0" dirty="0">
+                <a:solidFill>
+                  <a:srgbClr val="C2A35B"/>
+                </a:solidFill>
+                <a:latin typeface="Calibri" pitchFamily="34" charset="0"/>
+                <a:ea typeface="Calibri" pitchFamily="34" charset="-122"/>
+                <a:cs typeface="Calibri" pitchFamily="34" charset="-120"/>
+              </a:rPr>
+              <a:t>CONSTRUÇÃO</a:t>
             </a:r>
             <a:endParaRPr lang="en-US" sz="950" dirty="0"/>
           </a:p>
@@ -2251,14 +3318,53 @@
       </p:sp>
       <p:sp>
         <p:nvSpPr>
-          <p:cNvPr id="8" name="Text 5"/>
-          <p:cNvSpPr/>
-          <p:nvPr/>
-        </p:nvSpPr>
-        <p:spPr>
-          <a:xfrm>
-            <a:off x="822960" y="2606040"/>
-            <a:ext cx="7370613" cy="3566160"/>
+          <p:cNvPr id="16" name="Text 14"/>
+          <p:cNvSpPr/>
+          <p:nvPr/>
+        </p:nvSpPr>
+        <p:spPr>
+          <a:xfrm>
+            <a:off x="3246120" y="3877056"/>
+            <a:ext cx="1371600" cy="274320"/>
+          </a:xfrm>
+          <a:prstGeom prst="rect">
+            <a:avLst/>
+          </a:prstGeom>
+          <a:noFill/>
+          <a:ln/>
+        </p:spPr>
+        <p:txBody>
+          <a:bodyPr wrap="square" rtlCol="0" anchor="ctr"/>
+          <a:lstStyle/>
+          <a:p>
+            <a:pPr indent="0" marL="0">
+              <a:buNone/>
+            </a:pPr>
+            <a:r>
+              <a:rPr lang="en-US" sz="1050" i="1" dirty="0">
+                <a:solidFill>
+                  <a:srgbClr val="6E6858"/>
+                </a:solidFill>
+                <a:latin typeface="Cambria" pitchFamily="34" charset="0"/>
+                <a:ea typeface="Cambria" pitchFamily="34" charset="-122"/>
+                <a:cs typeface="Cambria" pitchFamily="34" charset="-120"/>
+              </a:rPr>
+              <a:t>Fase 2</a:t>
+            </a:r>
+            <a:endParaRPr lang="en-US" sz="1050" dirty="0"/>
+          </a:p>
+        </p:txBody>
+      </p:sp>
+      <p:sp>
+        <p:nvSpPr>
+          <p:cNvPr id="17" name="Text 15"/>
+          <p:cNvSpPr/>
+          <p:nvPr/>
+        </p:nvSpPr>
+        <p:spPr>
+          <a:xfrm>
+            <a:off x="4709160" y="3867912"/>
+            <a:ext cx="6656832" cy="603504"/>
           </a:xfrm>
           <a:prstGeom prst="rect">
             <a:avLst/>
@@ -2272,12 +3378,12 @@
           <a:p>
             <a:pPr algn="l" indent="0" marL="0">
               <a:lnSpc>
-                <a:spcPts val="1900"/>
+                <a:spcPts val="1300"/>
               </a:lnSpc>
               <a:buNone/>
             </a:pPr>
             <a:r>
-              <a:rPr lang="en-US" sz="1250" dirty="0">
+              <a:rPr lang="en-US" sz="1000" dirty="0">
                 <a:solidFill>
                   <a:srgbClr val="33394A"/>
                 </a:solidFill>
@@ -2285,19 +3391,142 @@
                 <a:ea typeface="Calibri" pitchFamily="34" charset="-122"/>
                 <a:cs typeface="Calibri" pitchFamily="34" charset="-120"/>
               </a:rPr>
-              <a:t>O que a fase 1 entrega:</a:t>
-            </a:r>
-            <a:endParaRPr lang="en-US" sz="1250" dirty="0"/>
-          </a:p>
+              <a:t>Os casos aprovados em produção: arquitetura, integrações com os seus sistemas e agentes com aprovação humana nos pontos certos. Erro caro passa por gente antes de acontecer.</a:t>
+            </a:r>
+            <a:endParaRPr lang="en-US" sz="1000" dirty="0"/>
+          </a:p>
+        </p:txBody>
+      </p:sp>
+      <p:sp>
+        <p:nvSpPr>
+          <p:cNvPr id="18" name="Shape 16"/>
+          <p:cNvSpPr/>
+          <p:nvPr/>
+        </p:nvSpPr>
+        <p:spPr>
+          <a:xfrm>
+            <a:off x="822960" y="4489704"/>
+            <a:ext cx="10543032" cy="0"/>
+          </a:xfrm>
+          <a:prstGeom prst="line">
+            <a:avLst/>
+          </a:prstGeom>
+          <a:noFill/>
+          <a:ln w="9525">
+            <a:solidFill>
+              <a:srgbClr val="E5E0D4"/>
+            </a:solidFill>
+            <a:prstDash val="solid"/>
+          </a:ln>
+        </p:spPr>
+      </p:sp>
+      <p:sp>
+        <p:nvSpPr>
+          <p:cNvPr id="19" name="Text 17"/>
+          <p:cNvSpPr/>
+          <p:nvPr/>
+        </p:nvSpPr>
+        <p:spPr>
+          <a:xfrm>
+            <a:off x="822960" y="4562856"/>
+            <a:ext cx="2331720" cy="292608"/>
+          </a:xfrm>
+          <a:prstGeom prst="rect">
+            <a:avLst/>
+          </a:prstGeom>
+          <a:noFill/>
+          <a:ln/>
+        </p:spPr>
+        <p:txBody>
+          <a:bodyPr wrap="square" rtlCol="0" anchor="ctr"/>
+          <a:lstStyle/>
+          <a:p>
+            <a:pPr algn="l" indent="0" marL="0">
+              <a:buNone/>
+            </a:pPr>
+            <a:r>
+              <a:rPr lang="en-US" sz="950" b="1" spc="300" kern="0" dirty="0">
+                <a:solidFill>
+                  <a:srgbClr val="C2A35B"/>
+                </a:solidFill>
+                <a:latin typeface="Calibri" pitchFamily="34" charset="0"/>
+                <a:ea typeface="Calibri" pitchFamily="34" charset="-122"/>
+                <a:cs typeface="Calibri" pitchFamily="34" charset="-120"/>
+              </a:rPr>
+              <a:t>CAPACITAÇÃO</a:t>
+            </a:r>
+            <a:endParaRPr lang="en-US" sz="950" dirty="0"/>
+          </a:p>
+        </p:txBody>
+      </p:sp>
+      <p:sp>
+        <p:nvSpPr>
+          <p:cNvPr id="20" name="Text 18"/>
+          <p:cNvSpPr/>
+          <p:nvPr/>
+        </p:nvSpPr>
+        <p:spPr>
+          <a:xfrm>
+            <a:off x="3246120" y="4544568"/>
+            <a:ext cx="1371600" cy="274320"/>
+          </a:xfrm>
+          <a:prstGeom prst="rect">
+            <a:avLst/>
+          </a:prstGeom>
+          <a:noFill/>
+          <a:ln/>
+        </p:spPr>
+        <p:txBody>
+          <a:bodyPr wrap="square" rtlCol="0" anchor="ctr"/>
+          <a:lstStyle/>
+          <a:p>
+            <a:pPr indent="0" marL="0">
+              <a:buNone/>
+            </a:pPr>
+            <a:r>
+              <a:rPr lang="en-US" sz="1050" i="1" dirty="0">
+                <a:solidFill>
+                  <a:srgbClr val="6E6858"/>
+                </a:solidFill>
+                <a:latin typeface="Cambria" pitchFamily="34" charset="0"/>
+                <a:ea typeface="Cambria" pitchFamily="34" charset="-122"/>
+                <a:cs typeface="Cambria" pitchFamily="34" charset="-120"/>
+              </a:rPr>
+              <a:t>Fase 2</a:t>
+            </a:r>
+            <a:endParaRPr lang="en-US" sz="1050" dirty="0"/>
+          </a:p>
+        </p:txBody>
+      </p:sp>
+      <p:sp>
+        <p:nvSpPr>
+          <p:cNvPr id="21" name="Text 19"/>
+          <p:cNvSpPr/>
+          <p:nvPr/>
+        </p:nvSpPr>
+        <p:spPr>
+          <a:xfrm>
+            <a:off x="4709160" y="4535424"/>
+            <a:ext cx="6656832" cy="603504"/>
+          </a:xfrm>
+          <a:prstGeom prst="rect">
+            <a:avLst/>
+          </a:prstGeom>
+          <a:noFill/>
+          <a:ln/>
+        </p:spPr>
+        <p:txBody>
+          <a:bodyPr wrap="square" rtlCol="0" anchor="ctr"/>
+          <a:lstStyle/>
           <a:p>
             <a:pPr algn="l" indent="0" marL="0">
               <a:lnSpc>
-                <a:spcPts val="1900"/>
+                <a:spcPts val="1300"/>
               </a:lnSpc>
               <a:buNone/>
             </a:pPr>
             <a:r>
-              <a:rPr lang="en-US" sz="1250" dirty="0">
+              <a:rPr lang="en-US" sz="1000" dirty="0">
                 <a:solidFill>
                   <a:srgbClr val="33394A"/>
                 </a:solidFill>
@@ -2305,19 +3534,142 @@
                 <a:ea typeface="Calibri" pitchFamily="34" charset="-122"/>
                 <a:cs typeface="Calibri" pitchFamily="34" charset="-120"/>
               </a:rPr>
-              <a:t>· o caso escolhido construído com os seus dados, em uso real;</a:t>
-            </a:r>
-            <a:endParaRPr lang="en-US" sz="1250" dirty="0"/>
-          </a:p>
+              <a:t>A turma da sua equipe no nosso portal, uma prática por dia no trabalho real, com fluência medida em 30, 60 e 90 dias. Sistema novo e gente formada andam juntos.</a:t>
+            </a:r>
+            <a:endParaRPr lang="en-US" sz="1000" dirty="0"/>
+          </a:p>
+        </p:txBody>
+      </p:sp>
+      <p:sp>
+        <p:nvSpPr>
+          <p:cNvPr id="22" name="Shape 20"/>
+          <p:cNvSpPr/>
+          <p:nvPr/>
+        </p:nvSpPr>
+        <p:spPr>
+          <a:xfrm>
+            <a:off x="822960" y="5157216"/>
+            <a:ext cx="10543032" cy="0"/>
+          </a:xfrm>
+          <a:prstGeom prst="line">
+            <a:avLst/>
+          </a:prstGeom>
+          <a:noFill/>
+          <a:ln w="9525">
+            <a:solidFill>
+              <a:srgbClr val="E5E0D4"/>
+            </a:solidFill>
+            <a:prstDash val="solid"/>
+          </a:ln>
+        </p:spPr>
+      </p:sp>
+      <p:sp>
+        <p:nvSpPr>
+          <p:cNvPr id="23" name="Text 21"/>
+          <p:cNvSpPr/>
+          <p:nvPr/>
+        </p:nvSpPr>
+        <p:spPr>
+          <a:xfrm>
+            <a:off x="822960" y="5230368"/>
+            <a:ext cx="2331720" cy="292608"/>
+          </a:xfrm>
+          <a:prstGeom prst="rect">
+            <a:avLst/>
+          </a:prstGeom>
+          <a:noFill/>
+          <a:ln/>
+        </p:spPr>
+        <p:txBody>
+          <a:bodyPr wrap="square" rtlCol="0" anchor="ctr"/>
+          <a:lstStyle/>
+          <a:p>
+            <a:pPr algn="l" indent="0" marL="0">
+              <a:buNone/>
+            </a:pPr>
+            <a:r>
+              <a:rPr lang="en-US" sz="950" b="1" spc="300" kern="0" dirty="0">
+                <a:solidFill>
+                  <a:srgbClr val="C2A35B"/>
+                </a:solidFill>
+                <a:latin typeface="Calibri" pitchFamily="34" charset="0"/>
+                <a:ea typeface="Calibri" pitchFamily="34" charset="-122"/>
+                <a:cs typeface="Calibri" pitchFamily="34" charset="-120"/>
+              </a:rPr>
+              <a:t>OPERAÇÃO ASSISTIDA</a:t>
+            </a:r>
+            <a:endParaRPr lang="en-US" sz="950" dirty="0"/>
+          </a:p>
+        </p:txBody>
+      </p:sp>
+      <p:sp>
+        <p:nvSpPr>
+          <p:cNvPr id="24" name="Text 22"/>
+          <p:cNvSpPr/>
+          <p:nvPr/>
+        </p:nvSpPr>
+        <p:spPr>
+          <a:xfrm>
+            <a:off x="3246120" y="5212080"/>
+            <a:ext cx="1371600" cy="274320"/>
+          </a:xfrm>
+          <a:prstGeom prst="rect">
+            <a:avLst/>
+          </a:prstGeom>
+          <a:noFill/>
+          <a:ln/>
+        </p:spPr>
+        <p:txBody>
+          <a:bodyPr wrap="square" rtlCol="0" anchor="ctr"/>
+          <a:lstStyle/>
+          <a:p>
+            <a:pPr indent="0" marL="0">
+              <a:buNone/>
+            </a:pPr>
+            <a:r>
+              <a:rPr lang="en-US" sz="1050" i="1" dirty="0">
+                <a:solidFill>
+                  <a:srgbClr val="6E6858"/>
+                </a:solidFill>
+                <a:latin typeface="Cambria" pitchFamily="34" charset="0"/>
+                <a:ea typeface="Cambria" pitchFamily="34" charset="-122"/>
+                <a:cs typeface="Cambria" pitchFamily="34" charset="-120"/>
+              </a:rPr>
+              <a:t>Fase 3</a:t>
+            </a:r>
+            <a:endParaRPr lang="en-US" sz="1050" dirty="0"/>
+          </a:p>
+        </p:txBody>
+      </p:sp>
+      <p:sp>
+        <p:nvSpPr>
+          <p:cNvPr id="25" name="Text 23"/>
+          <p:cNvSpPr/>
+          <p:nvPr/>
+        </p:nvSpPr>
+        <p:spPr>
+          <a:xfrm>
+            <a:off x="4709160" y="5202936"/>
+            <a:ext cx="6656832" cy="603504"/>
+          </a:xfrm>
+          <a:prstGeom prst="rect">
+            <a:avLst/>
+          </a:prstGeom>
+          <a:noFill/>
+          <a:ln/>
+        </p:spPr>
+        <p:txBody>
+          <a:bodyPr wrap="square" rtlCol="0" anchor="ctr"/>
+          <a:lstStyle/>
           <a:p>
             <a:pPr algn="l" indent="0" marL="0">
               <a:lnSpc>
-                <a:spcPts val="1900"/>
+                <a:spcPts val="1300"/>
               </a:lnSpc>
               <a:buNone/>
             </a:pPr>
             <a:r>
-              <a:rPr lang="en-US" sz="1250" dirty="0">
+              <a:rPr lang="en-US" sz="1000" dirty="0">
                 <a:solidFill>
                   <a:srgbClr val="33394A"/>
                 </a:solidFill>
@@ -2325,19 +3677,142 @@
                 <a:ea typeface="Calibri" pitchFamily="34" charset="-122"/>
                 <a:cs typeface="Calibri" pitchFamily="34" charset="-120"/>
               </a:rPr>
-              <a:t>· a medição de terceiro contra a métrica combinada — projetado versus realizado, assinado por uma pessoa nomeada da sua empresa;</a:t>
-            </a:r>
-            <a:endParaRPr lang="en-US" sz="1250" dirty="0"/>
-          </a:p>
+              <a:t>SLA, presença semanal e relatório mensal de projetado versus realizado, com a nossa mão cada vez mais leve, de propósito.</a:t>
+            </a:r>
+            <a:endParaRPr lang="en-US" sz="1000" dirty="0"/>
+          </a:p>
+        </p:txBody>
+      </p:sp>
+      <p:sp>
+        <p:nvSpPr>
+          <p:cNvPr id="26" name="Shape 24"/>
+          <p:cNvSpPr/>
+          <p:nvPr/>
+        </p:nvSpPr>
+        <p:spPr>
+          <a:xfrm>
+            <a:off x="822960" y="5824728"/>
+            <a:ext cx="10543032" cy="0"/>
+          </a:xfrm>
+          <a:prstGeom prst="line">
+            <a:avLst/>
+          </a:prstGeom>
+          <a:noFill/>
+          <a:ln w="9525">
+            <a:solidFill>
+              <a:srgbClr val="E5E0D4"/>
+            </a:solidFill>
+            <a:prstDash val="solid"/>
+          </a:ln>
+        </p:spPr>
+      </p:sp>
+      <p:sp>
+        <p:nvSpPr>
+          <p:cNvPr id="27" name="Text 25"/>
+          <p:cNvSpPr/>
+          <p:nvPr/>
+        </p:nvSpPr>
+        <p:spPr>
+          <a:xfrm>
+            <a:off x="822960" y="5897880"/>
+            <a:ext cx="2331720" cy="292608"/>
+          </a:xfrm>
+          <a:prstGeom prst="rect">
+            <a:avLst/>
+          </a:prstGeom>
+          <a:noFill/>
+          <a:ln/>
+        </p:spPr>
+        <p:txBody>
+          <a:bodyPr wrap="square" rtlCol="0" anchor="ctr"/>
+          <a:lstStyle/>
+          <a:p>
+            <a:pPr algn="l" indent="0" marL="0">
+              <a:buNone/>
+            </a:pPr>
+            <a:r>
+              <a:rPr lang="en-US" sz="950" b="1" spc="300" kern="0" dirty="0">
+                <a:solidFill>
+                  <a:srgbClr val="C2A35B"/>
+                </a:solidFill>
+                <a:latin typeface="Calibri" pitchFamily="34" charset="0"/>
+                <a:ea typeface="Calibri" pitchFamily="34" charset="-122"/>
+                <a:cs typeface="Calibri" pitchFamily="34" charset="-120"/>
+              </a:rPr>
+              <a:t>RITUAL COM A DIRETORIA</a:t>
+            </a:r>
+            <a:endParaRPr lang="en-US" sz="950" dirty="0"/>
+          </a:p>
+        </p:txBody>
+      </p:sp>
+      <p:sp>
+        <p:nvSpPr>
+          <p:cNvPr id="28" name="Text 26"/>
+          <p:cNvSpPr/>
+          <p:nvPr/>
+        </p:nvSpPr>
+        <p:spPr>
+          <a:xfrm>
+            <a:off x="3246120" y="5879592"/>
+            <a:ext cx="1371600" cy="274320"/>
+          </a:xfrm>
+          <a:prstGeom prst="rect">
+            <a:avLst/>
+          </a:prstGeom>
+          <a:noFill/>
+          <a:ln/>
+        </p:spPr>
+        <p:txBody>
+          <a:bodyPr wrap="square" rtlCol="0" anchor="ctr"/>
+          <a:lstStyle/>
+          <a:p>
+            <a:pPr indent="0" marL="0">
+              <a:buNone/>
+            </a:pPr>
+            <a:r>
+              <a:rPr lang="en-US" sz="1050" i="1" dirty="0">
+                <a:solidFill>
+                  <a:srgbClr val="6E6858"/>
+                </a:solidFill>
+                <a:latin typeface="Cambria" pitchFamily="34" charset="0"/>
+                <a:ea typeface="Cambria" pitchFamily="34" charset="-122"/>
+                <a:cs typeface="Cambria" pitchFamily="34" charset="-120"/>
+              </a:rPr>
+              <a:t>Fase 3 em diante</a:t>
+            </a:r>
+            <a:endParaRPr lang="en-US" sz="1050" dirty="0"/>
+          </a:p>
+        </p:txBody>
+      </p:sp>
+      <p:sp>
+        <p:nvSpPr>
+          <p:cNvPr id="29" name="Text 27"/>
+          <p:cNvSpPr/>
+          <p:nvPr/>
+        </p:nvSpPr>
+        <p:spPr>
+          <a:xfrm>
+            <a:off x="4709160" y="5870448"/>
+            <a:ext cx="6656832" cy="603504"/>
+          </a:xfrm>
+          <a:prstGeom prst="rect">
+            <a:avLst/>
+          </a:prstGeom>
+          <a:noFill/>
+          <a:ln/>
+        </p:spPr>
+        <p:txBody>
+          <a:bodyPr wrap="square" rtlCol="0" anchor="ctr"/>
+          <a:lstStyle/>
           <a:p>
             <a:pPr algn="l" indent="0" marL="0">
               <a:lnSpc>
-                <a:spcPts val="1900"/>
+                <a:spcPts val="1300"/>
               </a:lnSpc>
               <a:buNone/>
             </a:pPr>
             <a:r>
-              <a:rPr lang="en-US" sz="1250" dirty="0">
+              <a:rPr lang="en-US" sz="1000" dirty="0">
                 <a:solidFill>
                   <a:srgbClr val="33394A"/>
                 </a:solidFill>
@@ -2345,58 +3820,9 @@
                 <a:ea typeface="Calibri" pitchFamily="34" charset="-122"/>
                 <a:cs typeface="Calibri" pitchFamily="34" charset="-120"/>
               </a:rPr>
-              <a:t>· a avaliação de maturidade em 25 dimensões;</a:t>
-            </a:r>
-            <a:endParaRPr lang="en-US" sz="1250" dirty="0"/>
-          </a:p>
-          <a:p>
-            <a:pPr algn="l" indent="0" marL="0">
-              <a:lnSpc>
-                <a:spcPts val="1900"/>
-              </a:lnSpc>
-              <a:buNone/>
-            </a:pPr>
-            <a:r>
-              <a:rPr lang="en-US" sz="1250" dirty="0">
-                <a:solidFill>
-                  <a:srgbClr val="33394A"/>
-                </a:solidFill>
-                <a:latin typeface="Calibri" pitchFamily="34" charset="0"/>
-                <a:ea typeface="Calibri" pitchFamily="34" charset="-122"/>
-                <a:cs typeface="Calibri" pitchFamily="34" charset="-120"/>
-              </a:rPr>
-              <a:t>· o portfólio completo de oportunidades, ranqueado por retorno e esforço.</a:t>
-            </a:r>
-            <a:endParaRPr lang="en-US" sz="1250" dirty="0"/>
-          </a:p>
-          <a:p>
-            <a:pPr algn="l" indent="0" marL="0">
-              <a:lnSpc>
-                <a:spcPts val="1900"/>
-              </a:lnSpc>
-              <a:buNone/>
-            </a:pPr>
-            <a:endParaRPr lang="en-US" sz="1250" dirty="0"/>
-          </a:p>
-          <a:p>
-            <a:pPr algn="l" indent="0" marL="0">
-              <a:lnSpc>
-                <a:spcPts val="1900"/>
-              </a:lnSpc>
-              <a:buNone/>
-            </a:pPr>
-            <a:r>
-              <a:rPr lang="en-US" sz="1250" dirty="0">
-                <a:solidFill>
-                  <a:srgbClr val="33394A"/>
-                </a:solidFill>
-                <a:latin typeface="Calibri" pitchFamily="34" charset="0"/>
-                <a:ea typeface="Calibri" pitchFamily="34" charset="-122"/>
-                <a:cs typeface="Calibri" pitchFamily="34" charset="-120"/>
-              </a:rPr>
-              <a:t>O portfólio é seu, fique ou não: o portão retém execução, nunca informação.</a:t>
-            </a:r>
-            <a:endParaRPr lang="en-US" sz="1250" dirty="0"/>
+              <a:t>O registro de cada decisão contra o resultado medido, apresentado a quem decide. É o que vira o Exame Anual do ano 2.</a:t>
+            </a:r>
+            <a:endParaRPr lang="en-US" sz="1000" dirty="0"/>
           </a:p>
         </p:txBody>
       </p:sp>
@@ -2414,7 +3840,7 @@
     <p:bg>
       <p:bgPr>
         <a:solidFill>
-          <a:srgbClr val="1B2A4A"/>
+          <a:srgbClr val="FFFFFF"/>
         </a:solidFill>
       </p:bgPr>
     </p:bg>
@@ -2440,7 +3866,7 @@
         </p:nvSpPr>
         <p:spPr>
           <a:xfrm>
-            <a:off x="822960" y="1737360"/>
+            <a:off x="822960" y="594360"/>
             <a:ext cx="5486400" cy="292608"/>
           </a:xfrm>
           <a:prstGeom prst="rect">
@@ -2457,7 +3883,7 @@
               <a:buNone/>
             </a:pPr>
             <a:r>
-              <a:rPr lang="en-US" sz="1200" b="1" spc="300" kern="0" dirty="0">
+              <a:rPr lang="en-US" sz="1100" b="1" spc="300" kern="0" dirty="0">
                 <a:solidFill>
                   <a:srgbClr val="C2A35B"/>
                 </a:solidFill>
@@ -2465,9 +3891,9 @@
                 <a:ea typeface="Calibri" pitchFamily="34" charset="-122"/>
                 <a:cs typeface="Calibri" pitchFamily="34" charset="-120"/>
               </a:rPr>
-              <a:t>O PORTÃO DA PROVA · SEMANA 6</a:t>
-            </a:r>
-            <a:endParaRPr lang="en-US" sz="1200" dirty="0"/>
+              <a:t>FASE 1 · A PROVA · SEIS SEMANAS</a:t>
+            </a:r>
+            <a:endParaRPr lang="en-US" sz="1100" dirty="0"/>
           </a:p>
         </p:txBody>
       </p:sp>
@@ -2479,8 +3905,8 @@
         </p:nvSpPr>
         <p:spPr>
           <a:xfrm>
-            <a:off x="822960" y="2240280"/>
-            <a:ext cx="10543032" cy="1828800"/>
+            <a:off x="822960" y="960120"/>
+            <a:ext cx="10543032" cy="914400"/>
           </a:xfrm>
           <a:prstGeom prst="rect">
             <a:avLst/>
@@ -2494,47 +3920,66 @@
           <a:p>
             <a:pPr indent="0" marL="0">
               <a:lnSpc>
-                <a:spcPts val="3500"/>
+                <a:spcPts val="3300"/>
               </a:lnSpc>
               <a:buNone/>
             </a:pPr>
             <a:r>
-              <a:rPr lang="en-US" sz="2500" b="1" dirty="0">
-                <a:solidFill>
-                  <a:srgbClr val="FFFFFF"/>
+              <a:rPr lang="en-US" sz="2700" b="1" dirty="0">
+                <a:solidFill>
+                  <a:srgbClr val="1B2A4A"/>
                 </a:solidFill>
                 <a:latin typeface="Cambria" pitchFamily="34" charset="0"/>
                 <a:ea typeface="Cambria" pitchFamily="34" charset="-122"/>
                 <a:cs typeface="Cambria" pitchFamily="34" charset="-120"/>
               </a:rPr>
-              <a:t>Se o número combinado não apareceu — ou se você simplesmente mudar de ideia — você sai levando tudo. Sem multa.</a:t>
-            </a:r>
-            <a:endParaRPr lang="en-US" sz="2500" dirty="0"/>
-          </a:p>
-        </p:txBody>
-      </p:sp>
-      <p:sp>
-        <p:nvSpPr>
-          <p:cNvPr id="4" name="Shape 2"/>
-          <p:cNvSpPr/>
-          <p:nvPr/>
-        </p:nvSpPr>
-        <p:spPr>
-          <a:xfrm>
-            <a:off x="822960" y="4297680"/>
-            <a:ext cx="2011680" cy="0"/>
-          </a:xfrm>
-          <a:prstGeom prst="line">
-            <a:avLst/>
-          </a:prstGeom>
-          <a:noFill/>
-          <a:ln w="19050">
-            <a:solidFill>
-              <a:srgbClr val="C2A35B"/>
-            </a:solidFill>
-            <a:prstDash val="solid"/>
-          </a:ln>
-        </p:spPr>
+              <a:t>Um caso construído, rodando e medido. E o retrato inteiro.</a:t>
+            </a:r>
+            <a:endParaRPr lang="en-US" sz="2700" dirty="0"/>
+          </a:p>
+        </p:txBody>
+      </p:sp>
+      <p:sp>
+        <p:nvSpPr>
+          <p:cNvPr id="4" name="Text 2"/>
+          <p:cNvSpPr/>
+          <p:nvPr/>
+        </p:nvSpPr>
+        <p:spPr>
+          <a:xfrm>
+            <a:off x="822960" y="1920240"/>
+            <a:ext cx="7251192" cy="822960"/>
+          </a:xfrm>
+          <a:prstGeom prst="rect">
+            <a:avLst/>
+          </a:prstGeom>
+          <a:noFill/>
+          <a:ln/>
+        </p:spPr>
+        <p:txBody>
+          <a:bodyPr wrap="square" rtlCol="0" anchor="ctr"/>
+          <a:lstStyle/>
+          <a:p>
+            <a:pPr algn="l" indent="0" marL="0">
+              <a:lnSpc>
+                <a:spcPts val="2000"/>
+              </a:lnSpc>
+              <a:buNone/>
+            </a:pPr>
+            <a:r>
+              <a:rPr lang="en-US" sz="1300" dirty="0">
+                <a:solidFill>
+                  <a:srgbClr val="6E6858"/>
+                </a:solidFill>
+                <a:latin typeface="Calibri" pitchFamily="34" charset="0"/>
+                <a:ea typeface="Calibri" pitchFamily="34" charset="-122"/>
+                <a:cs typeface="Calibri" pitchFamily="34" charset="-120"/>
+              </a:rPr>
+              <a:t>A métrica é combinada por escrito na primeira semana. Ao fim, o número está na mesa. E a decisão é sua.</a:t>
+            </a:r>
+            <a:endParaRPr lang="en-US" sz="1300" dirty="0"/>
+          </a:p>
+        </p:txBody>
       </p:sp>
       <p:sp>
         <p:nvSpPr>
@@ -2544,37 +3989,251 @@
         </p:nvSpPr>
         <p:spPr>
           <a:xfrm>
-            <a:off x="822960" y="4526280"/>
-            <a:ext cx="10543032" cy="822960"/>
-          </a:xfrm>
-          <a:prstGeom prst="rect">
-            <a:avLst/>
-          </a:prstGeom>
-          <a:noFill/>
-          <a:ln/>
-        </p:spPr>
-        <p:txBody>
-          <a:bodyPr wrap="square" rtlCol="0" anchor="ctr"/>
-          <a:lstStyle/>
-          <a:p>
-            <a:pPr indent="0" marL="0">
+            <a:off x="822960" y="6400800"/>
+            <a:ext cx="10543032" cy="274320"/>
+          </a:xfrm>
+          <a:prstGeom prst="rect">
+            <a:avLst/>
+          </a:prstGeom>
+          <a:noFill/>
+          <a:ln/>
+        </p:spPr>
+        <p:txBody>
+          <a:bodyPr wrap="square" rtlCol="0" anchor="ctr"/>
+          <a:lstStyle/>
+          <a:p>
+            <a:pPr algn="ctr" indent="0" marL="0">
+              <a:buNone/>
+            </a:pPr>
+            <a:r>
+              <a:rPr lang="en-US" sz="900" spc="100" kern="0" dirty="0">
+                <a:solidFill>
+                  <a:srgbClr val="6E6858"/>
+                </a:solidFill>
+                <a:latin typeface="Calibri" pitchFamily="34" charset="0"/>
+                <a:ea typeface="Calibri" pitchFamily="34" charset="-122"/>
+                <a:cs typeface="Calibri" pitchFamily="34" charset="-120"/>
+              </a:rPr>
+              <a:t>ABBA Consultoria de IA · contato@abbaservices.com.br</a:t>
+            </a:r>
+            <a:endParaRPr lang="en-US" sz="900" dirty="0"/>
+          </a:p>
+        </p:txBody>
+      </p:sp>
+      <p:pic>
+        <p:nvPicPr>
+          <p:cNvPr id="6" name="Image 0" descr="/home/user/abba-ops/08-materiais/assets/fotos/prototipo--relatorio-gono-go.jpg">    </p:cNvPr>
+          <p:cNvPicPr>
+            <a:picLocks noChangeAspect="1"/>
+          </p:cNvPicPr>
+          <p:nvPr/>
+        </p:nvPicPr>
+        <p:blipFill>
+          <a:blip r:embed="rId1"/>
+          <a:stretch>
+            <a:fillRect/>
+          </a:stretch>
+        </p:blipFill>
+        <p:spPr>
+          <a:xfrm>
+            <a:off x="8650773" y="2331720"/>
+            <a:ext cx="2715219" cy="3840480"/>
+          </a:xfrm>
+          <a:prstGeom prst="rect">
+            <a:avLst/>
+          </a:prstGeom>
+        </p:spPr>
+      </p:pic>
+      <p:sp>
+        <p:nvSpPr>
+          <p:cNvPr id="7" name="Text 4"/>
+          <p:cNvSpPr/>
+          <p:nvPr/>
+        </p:nvSpPr>
+        <p:spPr>
+          <a:xfrm>
+            <a:off x="8650773" y="6217920"/>
+            <a:ext cx="2715219" cy="411480"/>
+          </a:xfrm>
+          <a:prstGeom prst="rect">
+            <a:avLst/>
+          </a:prstGeom>
+          <a:noFill/>
+          <a:ln/>
+        </p:spPr>
+        <p:txBody>
+          <a:bodyPr wrap="square" rtlCol="0" anchor="ctr"/>
+          <a:lstStyle/>
+          <a:p>
+            <a:pPr algn="l" indent="0" marL="0">
               <a:lnSpc>
-                <a:spcPts val="2300"/>
+                <a:spcPts val="1300"/>
               </a:lnSpc>
               <a:buNone/>
             </a:pPr>
             <a:r>
-              <a:rPr lang="en-US" sz="1500" i="1" dirty="0">
-                <a:solidFill>
-                  <a:srgbClr val="D8DCE8"/>
-                </a:solidFill>
-                <a:latin typeface="Cambria" pitchFamily="34" charset="0"/>
-                <a:ea typeface="Cambria" pitchFamily="34" charset="-122"/>
-                <a:cs typeface="Cambria" pitchFamily="34" charset="-120"/>
-              </a:rPr>
-              <a:t>Há mais dois portões como este: no mês 6 e no mês 12. Nenhuma fase começa sem a anterior ter provado — é o nosso risco, não o seu.</a:t>
-            </a:r>
-            <a:endParaRPr lang="en-US" sz="1500" dirty="0"/>
+              <a:rPr lang="en-US" sz="950" i="1" dirty="0">
+                <a:solidFill>
+                  <a:srgbClr val="6E6858"/>
+                </a:solidFill>
+                <a:latin typeface="Calibri" pitchFamily="34" charset="0"/>
+                <a:ea typeface="Calibri" pitchFamily="34" charset="-122"/>
+                <a:cs typeface="Calibri" pitchFamily="34" charset="-120"/>
+              </a:rPr>
+              <a:t>Relatório GO/NO-GO real de um protótipo (empresa preservada).</a:t>
+            </a:r>
+            <a:endParaRPr lang="en-US" sz="950" dirty="0"/>
+          </a:p>
+        </p:txBody>
+      </p:sp>
+      <p:sp>
+        <p:nvSpPr>
+          <p:cNvPr id="8" name="Text 5"/>
+          <p:cNvSpPr/>
+          <p:nvPr/>
+        </p:nvSpPr>
+        <p:spPr>
+          <a:xfrm>
+            <a:off x="822960" y="2606040"/>
+            <a:ext cx="7370613" cy="3566160"/>
+          </a:xfrm>
+          <a:prstGeom prst="rect">
+            <a:avLst/>
+          </a:prstGeom>
+          <a:noFill/>
+          <a:ln/>
+        </p:spPr>
+        <p:txBody>
+          <a:bodyPr wrap="square" rtlCol="0" anchor="ctr"/>
+          <a:lstStyle/>
+          <a:p>
+            <a:pPr algn="l" indent="0" marL="0">
+              <a:lnSpc>
+                <a:spcPts val="1900"/>
+              </a:lnSpc>
+              <a:buNone/>
+            </a:pPr>
+            <a:r>
+              <a:rPr lang="en-US" sz="1250" dirty="0">
+                <a:solidFill>
+                  <a:srgbClr val="33394A"/>
+                </a:solidFill>
+                <a:latin typeface="Calibri" pitchFamily="34" charset="0"/>
+                <a:ea typeface="Calibri" pitchFamily="34" charset="-122"/>
+                <a:cs typeface="Calibri" pitchFamily="34" charset="-120"/>
+              </a:rPr>
+              <a:t>O que a fase 1 entrega:</a:t>
+            </a:r>
+            <a:endParaRPr lang="en-US" sz="1250" dirty="0"/>
+          </a:p>
+          <a:p>
+            <a:pPr algn="l" indent="0" marL="0">
+              <a:lnSpc>
+                <a:spcPts val="1900"/>
+              </a:lnSpc>
+              <a:buNone/>
+            </a:pPr>
+            <a:r>
+              <a:rPr lang="en-US" sz="1250" dirty="0">
+                <a:solidFill>
+                  <a:srgbClr val="33394A"/>
+                </a:solidFill>
+                <a:latin typeface="Calibri" pitchFamily="34" charset="0"/>
+                <a:ea typeface="Calibri" pitchFamily="34" charset="-122"/>
+                <a:cs typeface="Calibri" pitchFamily="34" charset="-120"/>
+              </a:rPr>
+              <a:t>· o caso escolhido construído com os seus dados, em uso real;</a:t>
+            </a:r>
+            <a:endParaRPr lang="en-US" sz="1250" dirty="0"/>
+          </a:p>
+          <a:p>
+            <a:pPr algn="l" indent="0" marL="0">
+              <a:lnSpc>
+                <a:spcPts val="1900"/>
+              </a:lnSpc>
+              <a:buNone/>
+            </a:pPr>
+            <a:r>
+              <a:rPr lang="en-US" sz="1250" dirty="0">
+                <a:solidFill>
+                  <a:srgbClr val="33394A"/>
+                </a:solidFill>
+                <a:latin typeface="Calibri" pitchFamily="34" charset="0"/>
+                <a:ea typeface="Calibri" pitchFamily="34" charset="-122"/>
+                <a:cs typeface="Calibri" pitchFamily="34" charset="-120"/>
+              </a:rPr>
+              <a:t>· a medição de terceiro contra a métrica combinada: projetado versus realizado, assinado por uma pessoa nomeada da sua empresa;</a:t>
+            </a:r>
+            <a:endParaRPr lang="en-US" sz="1250" dirty="0"/>
+          </a:p>
+          <a:p>
+            <a:pPr algn="l" indent="0" marL="0">
+              <a:lnSpc>
+                <a:spcPts val="1900"/>
+              </a:lnSpc>
+              <a:buNone/>
+            </a:pPr>
+            <a:r>
+              <a:rPr lang="en-US" sz="1250" dirty="0">
+                <a:solidFill>
+                  <a:srgbClr val="33394A"/>
+                </a:solidFill>
+                <a:latin typeface="Calibri" pitchFamily="34" charset="0"/>
+                <a:ea typeface="Calibri" pitchFamily="34" charset="-122"/>
+                <a:cs typeface="Calibri" pitchFamily="34" charset="-120"/>
+              </a:rPr>
+              <a:t>· a avaliação profunda de maturidade;</a:t>
+            </a:r>
+            <a:endParaRPr lang="en-US" sz="1250" dirty="0"/>
+          </a:p>
+          <a:p>
+            <a:pPr algn="l" indent="0" marL="0">
+              <a:lnSpc>
+                <a:spcPts val="1900"/>
+              </a:lnSpc>
+              <a:buNone/>
+            </a:pPr>
+            <a:r>
+              <a:rPr lang="en-US" sz="1250" dirty="0">
+                <a:solidFill>
+                  <a:srgbClr val="33394A"/>
+                </a:solidFill>
+                <a:latin typeface="Calibri" pitchFamily="34" charset="0"/>
+                <a:ea typeface="Calibri" pitchFamily="34" charset="-122"/>
+                <a:cs typeface="Calibri" pitchFamily="34" charset="-120"/>
+              </a:rPr>
+              <a:t>· o retrato completo de oportunidades, ranqueado por retorno e esforço.</a:t>
+            </a:r>
+            <a:endParaRPr lang="en-US" sz="1250" dirty="0"/>
+          </a:p>
+          <a:p>
+            <a:pPr algn="l" indent="0" marL="0">
+              <a:lnSpc>
+                <a:spcPts val="1900"/>
+              </a:lnSpc>
+              <a:buNone/>
+            </a:pPr>
+            <a:endParaRPr lang="en-US" sz="1250" dirty="0"/>
+          </a:p>
+          <a:p>
+            <a:pPr algn="l" indent="0" marL="0">
+              <a:lnSpc>
+                <a:spcPts val="1900"/>
+              </a:lnSpc>
+              <a:buNone/>
+            </a:pPr>
+            <a:r>
+              <a:rPr lang="en-US" sz="1250" dirty="0">
+                <a:solidFill>
+                  <a:srgbClr val="33394A"/>
+                </a:solidFill>
+                <a:latin typeface="Calibri" pitchFamily="34" charset="0"/>
+                <a:ea typeface="Calibri" pitchFamily="34" charset="-122"/>
+                <a:cs typeface="Calibri" pitchFamily="34" charset="-120"/>
+              </a:rPr>
+              <a:t>O retrato é seu, fique ou não: o portão retém execução, nunca informação.</a:t>
+            </a:r>
+            <a:endParaRPr lang="en-US" sz="1250" dirty="0"/>
           </a:p>
         </p:txBody>
       </p:sp>
@@ -2643,7 +4302,7 @@
                 <a:ea typeface="Calibri" pitchFamily="34" charset="-122"/>
                 <a:cs typeface="Calibri" pitchFamily="34" charset="-120"/>
               </a:rPr>
-              <a:t>FASE 2 · A CONSTRUÇÃO — MESES 2 A 6</a:t>
+              <a:t>COMO SE COMBINA UM NÚMERO</a:t>
             </a:r>
             <a:endParaRPr lang="en-US" sz="1100" dirty="0"/>
           </a:p>
@@ -2685,7 +4344,7 @@
                 <a:ea typeface="Cambria" pitchFamily="34" charset="-122"/>
                 <a:cs typeface="Cambria" pitchFamily="34" charset="-120"/>
               </a:rPr>
-              <a:t>Sistemas em produção. Pessoas formadas. Juntos.</a:t>
+              <a:t>Palavra por palavra, antes de começar. Como numa proposta real.</a:t>
             </a:r>
             <a:endParaRPr lang="en-US" sz="2700" dirty="0"/>
           </a:p>
@@ -2700,7 +4359,7 @@
         <p:spPr>
           <a:xfrm>
             <a:off x="822960" y="1920240"/>
-            <a:ext cx="7251192" cy="822960"/>
+            <a:ext cx="10543032" cy="822960"/>
           </a:xfrm>
           <a:prstGeom prst="rect">
             <a:avLst/>
@@ -2727,7 +4386,7 @@
                 <a:ea typeface="Calibri" pitchFamily="34" charset="-122"/>
                 <a:cs typeface="Calibri" pitchFamily="34" charset="-120"/>
               </a:rPr>
-              <a:t>Os casos que você aprovou no portfólio entram em produção — e a sua equipe é formada em turma própria, em paralelo.</a:t>
+              <a:t>De uma proposta emitida em agosto de 2026 (empresa preservada, setor de eventos): o piloto já nasce com a meta travada por escrito na reunião técnica, e o fechamento mede contra ela.</a:t>
             </a:r>
             <a:endParaRPr lang="en-US" sz="1300" dirty="0"/>
           </a:p>
@@ -2772,40 +4431,78 @@
           </a:p>
         </p:txBody>
       </p:sp>
-      <p:pic>
-        <p:nvPicPr>
-          <p:cNvPr id="6" name="Image 0" descr="/home/user/abba-ops/08-materiais/assets/fotos/construcao--relatorio-deployment.jpg">    </p:cNvPr>
-          <p:cNvPicPr>
-            <a:picLocks noChangeAspect="1"/>
-          </p:cNvPicPr>
-          <p:nvPr/>
-        </p:nvPicPr>
-        <p:blipFill>
-          <a:blip r:embed="rId1"/>
-          <a:stretch>
-            <a:fillRect/>
-          </a:stretch>
-        </p:blipFill>
-        <p:spPr>
-          <a:xfrm>
-            <a:off x="8650773" y="2331720"/>
-            <a:ext cx="2715219" cy="3840480"/>
-          </a:xfrm>
-          <a:prstGeom prst="rect">
-            <a:avLst/>
-          </a:prstGeom>
-        </p:spPr>
-      </p:pic>
-      <p:sp>
-        <p:nvSpPr>
-          <p:cNvPr id="7" name="Text 4"/>
-          <p:cNvSpPr/>
-          <p:nvPr/>
-        </p:nvSpPr>
-        <p:spPr>
-          <a:xfrm>
-            <a:off x="8650773" y="6217920"/>
-            <a:ext cx="2715219" cy="411480"/>
+      <p:sp>
+        <p:nvSpPr>
+          <p:cNvPr id="6" name="Shape 4"/>
+          <p:cNvSpPr/>
+          <p:nvPr/>
+        </p:nvSpPr>
+        <p:spPr>
+          <a:xfrm>
+            <a:off x="822960" y="2697480"/>
+            <a:ext cx="10543032" cy="0"/>
+          </a:xfrm>
+          <a:prstGeom prst="line">
+            <a:avLst/>
+          </a:prstGeom>
+          <a:noFill/>
+          <a:ln w="9525">
+            <a:solidFill>
+              <a:srgbClr val="E5E0D4"/>
+            </a:solidFill>
+            <a:prstDash val="solid"/>
+          </a:ln>
+        </p:spPr>
+      </p:sp>
+      <p:sp>
+        <p:nvSpPr>
+          <p:cNvPr id="7" name="Text 5"/>
+          <p:cNvSpPr/>
+          <p:nvPr/>
+        </p:nvSpPr>
+        <p:spPr>
+          <a:xfrm>
+            <a:off x="822960" y="2788920"/>
+            <a:ext cx="2377440" cy="292608"/>
+          </a:xfrm>
+          <a:prstGeom prst="rect">
+            <a:avLst/>
+          </a:prstGeom>
+          <a:noFill/>
+          <a:ln/>
+        </p:spPr>
+        <p:txBody>
+          <a:bodyPr wrap="square" rtlCol="0" anchor="ctr"/>
+          <a:lstStyle/>
+          <a:p>
+            <a:pPr algn="l" indent="0" marL="0">
+              <a:buNone/>
+            </a:pPr>
+            <a:r>
+              <a:rPr lang="en-US" sz="1000" b="1" spc="300" kern="0" dirty="0">
+                <a:solidFill>
+                  <a:srgbClr val="C2A35B"/>
+                </a:solidFill>
+                <a:latin typeface="Calibri" pitchFamily="34" charset="0"/>
+                <a:ea typeface="Calibri" pitchFamily="34" charset="-122"/>
+                <a:cs typeface="Calibri" pitchFamily="34" charset="-120"/>
+              </a:rPr>
+              <a:t>META COMBINADA 1</a:t>
+            </a:r>
+            <a:endParaRPr lang="en-US" sz="1000" dirty="0"/>
+          </a:p>
+        </p:txBody>
+      </p:sp>
+      <p:sp>
+        <p:nvSpPr>
+          <p:cNvPr id="8" name="Text 6"/>
+          <p:cNvSpPr/>
+          <p:nvPr/>
+        </p:nvSpPr>
+        <p:spPr>
+          <a:xfrm>
+            <a:off x="3383280" y="2770632"/>
+            <a:ext cx="7982712" cy="685800"/>
           </a:xfrm>
           <a:prstGeom prst="rect">
             <a:avLst/>
@@ -2819,93 +4516,376 @@
           <a:p>
             <a:pPr algn="l" indent="0" marL="0">
               <a:lnSpc>
-                <a:spcPts val="1300"/>
+                <a:spcPts val="1600"/>
               </a:lnSpc>
               <a:buNone/>
             </a:pPr>
             <a:r>
-              <a:rPr lang="en-US" sz="950" i="1" dirty="0">
-                <a:solidFill>
-                  <a:srgbClr val="6E6858"/>
-                </a:solidFill>
-                <a:latin typeface="Calibri" pitchFamily="34" charset="0"/>
-                <a:ea typeface="Calibri" pitchFamily="34" charset="-122"/>
-                <a:cs typeface="Calibri" pitchFamily="34" charset="-120"/>
-              </a:rPr>
-              <a:t>Relatório de implantação real (empresa preservada).</a:t>
-            </a:r>
-            <a:endParaRPr lang="en-US" sz="950" dirty="0"/>
-          </a:p>
-        </p:txBody>
-      </p:sp>
-      <p:sp>
-        <p:nvSpPr>
-          <p:cNvPr id="8" name="Text 5"/>
-          <p:cNvSpPr/>
-          <p:nvPr/>
-        </p:nvSpPr>
-        <p:spPr>
-          <a:xfrm>
-            <a:off x="822960" y="2606040"/>
-            <a:ext cx="7370613" cy="3383280"/>
-          </a:xfrm>
-          <a:prstGeom prst="rect">
-            <a:avLst/>
-          </a:prstGeom>
-          <a:noFill/>
-          <a:ln/>
-        </p:spPr>
-        <p:txBody>
-          <a:bodyPr wrap="square" rtlCol="0" anchor="ctr"/>
-          <a:lstStyle/>
-          <a:p>
-            <a:pPr algn="l" indent="0" marL="0">
+              <a:rPr lang="en-US" sz="1200" dirty="0">
+                <a:solidFill>
+                  <a:srgbClr val="33394A"/>
+                </a:solidFill>
+                <a:latin typeface="Calibri" pitchFamily="34" charset="0"/>
+                <a:ea typeface="Calibri" pitchFamily="34" charset="-122"/>
+                <a:cs typeface="Calibri" pitchFamily="34" charset="-120"/>
+              </a:rPr>
+              <a:t>Zero encaminhamento manual: a lista inteira de convidados processada sem o dono tocar no telefone.</a:t>
+            </a:r>
+            <a:endParaRPr lang="en-US" sz="1200" dirty="0"/>
+          </a:p>
+        </p:txBody>
+      </p:sp>
+      <p:sp>
+        <p:nvSpPr>
+          <p:cNvPr id="9" name="Shape 7"/>
+          <p:cNvSpPr/>
+          <p:nvPr/>
+        </p:nvSpPr>
+        <p:spPr>
+          <a:xfrm>
+            <a:off x="822960" y="3520440"/>
+            <a:ext cx="10543032" cy="0"/>
+          </a:xfrm>
+          <a:prstGeom prst="line">
+            <a:avLst/>
+          </a:prstGeom>
+          <a:noFill/>
+          <a:ln w="9525">
+            <a:solidFill>
+              <a:srgbClr val="E5E0D4"/>
+            </a:solidFill>
+            <a:prstDash val="solid"/>
+          </a:ln>
+        </p:spPr>
+      </p:sp>
+      <p:sp>
+        <p:nvSpPr>
+          <p:cNvPr id="10" name="Text 8"/>
+          <p:cNvSpPr/>
+          <p:nvPr/>
+        </p:nvSpPr>
+        <p:spPr>
+          <a:xfrm>
+            <a:off x="822960" y="3611880"/>
+            <a:ext cx="2377440" cy="292608"/>
+          </a:xfrm>
+          <a:prstGeom prst="rect">
+            <a:avLst/>
+          </a:prstGeom>
+          <a:noFill/>
+          <a:ln/>
+        </p:spPr>
+        <p:txBody>
+          <a:bodyPr wrap="square" rtlCol="0" anchor="ctr"/>
+          <a:lstStyle/>
+          <a:p>
+            <a:pPr algn="l" indent="0" marL="0">
+              <a:buNone/>
+            </a:pPr>
+            <a:r>
+              <a:rPr lang="en-US" sz="1000" b="1" spc="300" kern="0" dirty="0">
+                <a:solidFill>
+                  <a:srgbClr val="C2A35B"/>
+                </a:solidFill>
+                <a:latin typeface="Calibri" pitchFamily="34" charset="0"/>
+                <a:ea typeface="Calibri" pitchFamily="34" charset="-122"/>
+                <a:cs typeface="Calibri" pitchFamily="34" charset="-120"/>
+              </a:rPr>
+              <a:t>META COMBINADA 2</a:t>
+            </a:r>
+            <a:endParaRPr lang="en-US" sz="1000" dirty="0"/>
+          </a:p>
+        </p:txBody>
+      </p:sp>
+      <p:sp>
+        <p:nvSpPr>
+          <p:cNvPr id="11" name="Text 9"/>
+          <p:cNvSpPr/>
+          <p:nvPr/>
+        </p:nvSpPr>
+        <p:spPr>
+          <a:xfrm>
+            <a:off x="3383280" y="3593592"/>
+            <a:ext cx="7982712" cy="685800"/>
+          </a:xfrm>
+          <a:prstGeom prst="rect">
+            <a:avLst/>
+          </a:prstGeom>
+          <a:noFill/>
+          <a:ln/>
+        </p:spPr>
+        <p:txBody>
+          <a:bodyPr wrap="square" rtlCol="0" anchor="ctr"/>
+          <a:lstStyle/>
+          <a:p>
+            <a:pPr algn="l" indent="0" marL="0">
+              <a:lnSpc>
+                <a:spcPts val="1600"/>
+              </a:lnSpc>
+              <a:buNone/>
+            </a:pPr>
+            <a:r>
+              <a:rPr lang="en-US" sz="1200" dirty="0">
+                <a:solidFill>
+                  <a:srgbClr val="33394A"/>
+                </a:solidFill>
+                <a:latin typeface="Calibri" pitchFamily="34" charset="0"/>
+                <a:ea typeface="Calibri" pitchFamily="34" charset="-122"/>
+                <a:cs typeface="Calibri" pitchFamily="34" charset="-120"/>
+              </a:rPr>
+              <a:t>Taxa de confirmação igual ou melhor que a do último evento comparável, com o esforço de horas caindo a quase zero.</a:t>
+            </a:r>
+            <a:endParaRPr lang="en-US" sz="1200" dirty="0"/>
+          </a:p>
+        </p:txBody>
+      </p:sp>
+      <p:sp>
+        <p:nvSpPr>
+          <p:cNvPr id="12" name="Shape 10"/>
+          <p:cNvSpPr/>
+          <p:nvPr/>
+        </p:nvSpPr>
+        <p:spPr>
+          <a:xfrm>
+            <a:off x="822960" y="4343400"/>
+            <a:ext cx="10543032" cy="0"/>
+          </a:xfrm>
+          <a:prstGeom prst="line">
+            <a:avLst/>
+          </a:prstGeom>
+          <a:noFill/>
+          <a:ln w="9525">
+            <a:solidFill>
+              <a:srgbClr val="E5E0D4"/>
+            </a:solidFill>
+            <a:prstDash val="solid"/>
+          </a:ln>
+        </p:spPr>
+      </p:sp>
+      <p:sp>
+        <p:nvSpPr>
+          <p:cNvPr id="13" name="Text 11"/>
+          <p:cNvSpPr/>
+          <p:nvPr/>
+        </p:nvSpPr>
+        <p:spPr>
+          <a:xfrm>
+            <a:off x="822960" y="4434840"/>
+            <a:ext cx="2377440" cy="292608"/>
+          </a:xfrm>
+          <a:prstGeom prst="rect">
+            <a:avLst/>
+          </a:prstGeom>
+          <a:noFill/>
+          <a:ln/>
+        </p:spPr>
+        <p:txBody>
+          <a:bodyPr wrap="square" rtlCol="0" anchor="ctr"/>
+          <a:lstStyle/>
+          <a:p>
+            <a:pPr algn="l" indent="0" marL="0">
+              <a:buNone/>
+            </a:pPr>
+            <a:r>
+              <a:rPr lang="en-US" sz="1000" b="1" spc="300" kern="0" dirty="0">
+                <a:solidFill>
+                  <a:srgbClr val="C2A35B"/>
+                </a:solidFill>
+                <a:latin typeface="Calibri" pitchFamily="34" charset="0"/>
+                <a:ea typeface="Calibri" pitchFamily="34" charset="-122"/>
+                <a:cs typeface="Calibri" pitchFamily="34" charset="-120"/>
+              </a:rPr>
+              <a:t>META COMBINADA 3</a:t>
+            </a:r>
+            <a:endParaRPr lang="en-US" sz="1000" dirty="0"/>
+          </a:p>
+        </p:txBody>
+      </p:sp>
+      <p:sp>
+        <p:nvSpPr>
+          <p:cNvPr id="14" name="Text 12"/>
+          <p:cNvSpPr/>
+          <p:nvPr/>
+        </p:nvSpPr>
+        <p:spPr>
+          <a:xfrm>
+            <a:off x="3383280" y="4416552"/>
+            <a:ext cx="7982712" cy="685800"/>
+          </a:xfrm>
+          <a:prstGeom prst="rect">
+            <a:avLst/>
+          </a:prstGeom>
+          <a:noFill/>
+          <a:ln/>
+        </p:spPr>
+        <p:txBody>
+          <a:bodyPr wrap="square" rtlCol="0" anchor="ctr"/>
+          <a:lstStyle/>
+          <a:p>
+            <a:pPr algn="l" indent="0" marL="0">
+              <a:lnSpc>
+                <a:spcPts val="1600"/>
+              </a:lnSpc>
+              <a:buNone/>
+            </a:pPr>
+            <a:r>
+              <a:rPr lang="en-US" sz="1200" dirty="0">
+                <a:solidFill>
+                  <a:srgbClr val="33394A"/>
+                </a:solidFill>
+                <a:latin typeface="Calibri" pitchFamily="34" charset="0"/>
+                <a:ea typeface="Calibri" pitchFamily="34" charset="-122"/>
+                <a:cs typeface="Calibri" pitchFamily="34" charset="-120"/>
+              </a:rPr>
+              <a:t>Todo contato com resposta registrada: quem confirmou, quem recusou, quem ficou no encerramento.</a:t>
+            </a:r>
+            <a:endParaRPr lang="en-US" sz="1200" dirty="0"/>
+          </a:p>
+        </p:txBody>
+      </p:sp>
+      <p:sp>
+        <p:nvSpPr>
+          <p:cNvPr id="15" name="Shape 13"/>
+          <p:cNvSpPr/>
+          <p:nvPr/>
+        </p:nvSpPr>
+        <p:spPr>
+          <a:xfrm>
+            <a:off x="822960" y="5166360"/>
+            <a:ext cx="10543032" cy="0"/>
+          </a:xfrm>
+          <a:prstGeom prst="line">
+            <a:avLst/>
+          </a:prstGeom>
+          <a:noFill/>
+          <a:ln w="9525">
+            <a:solidFill>
+              <a:srgbClr val="E5E0D4"/>
+            </a:solidFill>
+            <a:prstDash val="solid"/>
+          </a:ln>
+        </p:spPr>
+      </p:sp>
+      <p:sp>
+        <p:nvSpPr>
+          <p:cNvPr id="16" name="Text 14"/>
+          <p:cNvSpPr/>
+          <p:nvPr/>
+        </p:nvSpPr>
+        <p:spPr>
+          <a:xfrm>
+            <a:off x="822960" y="5257800"/>
+            <a:ext cx="2377440" cy="292608"/>
+          </a:xfrm>
+          <a:prstGeom prst="rect">
+            <a:avLst/>
+          </a:prstGeom>
+          <a:noFill/>
+          <a:ln/>
+        </p:spPr>
+        <p:txBody>
+          <a:bodyPr wrap="square" rtlCol="0" anchor="ctr"/>
+          <a:lstStyle/>
+          <a:p>
+            <a:pPr algn="l" indent="0" marL="0">
+              <a:buNone/>
+            </a:pPr>
+            <a:r>
+              <a:rPr lang="en-US" sz="1000" b="1" spc="300" kern="0" dirty="0">
+                <a:solidFill>
+                  <a:srgbClr val="C2A35B"/>
+                </a:solidFill>
+                <a:latin typeface="Calibri" pitchFamily="34" charset="0"/>
+                <a:ea typeface="Calibri" pitchFamily="34" charset="-122"/>
+                <a:cs typeface="Calibri" pitchFamily="34" charset="-120"/>
+              </a:rPr>
+              <a:t>A MEDIÇÃO</a:t>
+            </a:r>
+            <a:endParaRPr lang="en-US" sz="1000" dirty="0"/>
+          </a:p>
+        </p:txBody>
+      </p:sp>
+      <p:sp>
+        <p:nvSpPr>
+          <p:cNvPr id="17" name="Text 15"/>
+          <p:cNvSpPr/>
+          <p:nvPr/>
+        </p:nvSpPr>
+        <p:spPr>
+          <a:xfrm>
+            <a:off x="3383280" y="5239512"/>
+            <a:ext cx="7982712" cy="685800"/>
+          </a:xfrm>
+          <a:prstGeom prst="rect">
+            <a:avLst/>
+          </a:prstGeom>
+          <a:noFill/>
+          <a:ln/>
+        </p:spPr>
+        <p:txBody>
+          <a:bodyPr wrap="square" rtlCol="0" anchor="ctr"/>
+          <a:lstStyle/>
+          <a:p>
+            <a:pPr algn="l" indent="0" marL="0">
+              <a:lnSpc>
+                <a:spcPts val="1600"/>
+              </a:lnSpc>
+              <a:buNone/>
+            </a:pPr>
+            <a:r>
+              <a:rPr lang="en-US" sz="1200" dirty="0">
+                <a:solidFill>
+                  <a:srgbClr val="33394A"/>
+                </a:solidFill>
+                <a:latin typeface="Calibri" pitchFamily="34" charset="0"/>
+                <a:ea typeface="Calibri" pitchFamily="34" charset="-122"/>
+                <a:cs typeface="Calibri" pitchFamily="34" charset="-120"/>
+              </a:rPr>
+              <a:t>O relatório de fechamento do piloto compara os números do evento contra a meta combinada antes. É esse papel que decide a conversa seguinte: não a nossa opinião.</a:t>
+            </a:r>
+            <a:endParaRPr lang="en-US" sz="1200" dirty="0"/>
+          </a:p>
+        </p:txBody>
+      </p:sp>
+      <p:sp>
+        <p:nvSpPr>
+          <p:cNvPr id="18" name="Text 16"/>
+          <p:cNvSpPr/>
+          <p:nvPr/>
+        </p:nvSpPr>
+        <p:spPr>
+          <a:xfrm>
+            <a:off x="822960" y="6053328"/>
+            <a:ext cx="10543032" cy="320040"/>
+          </a:xfrm>
+          <a:prstGeom prst="rect">
+            <a:avLst/>
+          </a:prstGeom>
+          <a:noFill/>
+          <a:ln/>
+        </p:spPr>
+        <p:txBody>
+          <a:bodyPr wrap="square" rtlCol="0" anchor="ctr"/>
+          <a:lstStyle/>
+          <a:p>
+            <a:pPr algn="ctr" indent="0" marL="0">
               <a:lnSpc>
                 <a:spcPts val="2000"/>
               </a:lnSpc>
               <a:buNone/>
             </a:pPr>
             <a:r>
-              <a:rPr lang="en-US" sz="1300" dirty="0">
-                <a:solidFill>
-                  <a:srgbClr val="33394A"/>
-                </a:solidFill>
-                <a:latin typeface="Calibri" pitchFamily="34" charset="0"/>
-                <a:ea typeface="Calibri" pitchFamily="34" charset="-122"/>
-                <a:cs typeface="Calibri" pitchFamily="34" charset="-120"/>
-              </a:rPr>
-              <a:t>Engenharia de verdade: arquitetura, integrações com os seus sistemas e agentes de IA com pontos de aprovação humana desenhados — erro caro passa por gente antes de acontecer.</a:t>
-            </a:r>
-            <a:endParaRPr lang="en-US" sz="1300" dirty="0"/>
-          </a:p>
-          <a:p>
-            <a:pPr algn="l" indent="0" marL="0">
-              <a:lnSpc>
-                <a:spcPts val="2000"/>
-              </a:lnSpc>
-              <a:buNone/>
-            </a:pPr>
-            <a:endParaRPr lang="en-US" sz="1300" dirty="0"/>
-          </a:p>
-          <a:p>
-            <a:pPr algn="l" indent="0" marL="0">
-              <a:lnSpc>
-                <a:spcPts val="2000"/>
-              </a:lnSpc>
-              <a:buNone/>
-            </a:pPr>
-            <a:r>
-              <a:rPr lang="en-US" sz="1300" dirty="0">
-                <a:solidFill>
-                  <a:srgbClr val="33394A"/>
-                </a:solidFill>
-                <a:latin typeface="Calibri" pitchFamily="34" charset="0"/>
-                <a:ea typeface="Calibri" pitchFamily="34" charset="-122"/>
-                <a:cs typeface="Calibri" pitchFamily="34" charset="-120"/>
-              </a:rPr>
-              <a:t>Capacitação medida: turma própria na nossa plataforma, com trilhas por papel e fluência medida em 30, 60 e 90 dias — porque sistema novo com a empresa pensando do jeito antigo não transforma nada.</a:t>
-            </a:r>
-            <a:endParaRPr lang="en-US" sz="1300" dirty="0"/>
+              <a:rPr lang="en-US" sz="1150" i="1" dirty="0">
+                <a:solidFill>
+                  <a:srgbClr val="1B2A4A"/>
+                </a:solidFill>
+                <a:latin typeface="Cambria" pitchFamily="34" charset="0"/>
+                <a:ea typeface="Cambria" pitchFamily="34" charset="-122"/>
+                <a:cs typeface="Cambria" pitchFamily="34" charset="-120"/>
+              </a:rPr>
+              <a:t>É assim em todo caso da ABBA, do piloto de seis semanas ao ano inteiro: sucesso combinado antes, medido depois.</a:t>
+            </a:r>
+            <a:endParaRPr lang="en-US" sz="1150" dirty="0"/>
           </a:p>
         </p:txBody>
       </p:sp>
@@ -2923,7 +4903,7 @@
     <p:bg>
       <p:bgPr>
         <a:solidFill>
-          <a:srgbClr val="FFFFFF"/>
+          <a:srgbClr val="1B2A4A"/>
         </a:solidFill>
       </p:bgPr>
     </p:bg>
@@ -2949,7 +4929,7 @@
         </p:nvSpPr>
         <p:spPr>
           <a:xfrm>
-            <a:off x="822960" y="594360"/>
+            <a:off x="822960" y="1737360"/>
             <a:ext cx="5486400" cy="292608"/>
           </a:xfrm>
           <a:prstGeom prst="rect">
@@ -2966,7 +4946,7 @@
               <a:buNone/>
             </a:pPr>
             <a:r>
-              <a:rPr lang="en-US" sz="1100" b="1" spc="300" kern="0" dirty="0">
+              <a:rPr lang="en-US" sz="1200" b="1" spc="300" kern="0" dirty="0">
                 <a:solidFill>
                   <a:srgbClr val="C2A35B"/>
                 </a:solidFill>
@@ -2974,9 +4954,9 @@
                 <a:ea typeface="Calibri" pitchFamily="34" charset="-122"/>
                 <a:cs typeface="Calibri" pitchFamily="34" charset="-120"/>
               </a:rPr>
-              <a:t>FASE 3 · A DURABILIDADE — MESES 7 A 12</a:t>
-            </a:r>
-            <a:endParaRPr lang="en-US" sz="1100" dirty="0"/>
+              <a:t>O PORTÃO DA PROVA · SEMANA 6</a:t>
+            </a:r>
+            <a:endParaRPr lang="en-US" sz="1200" dirty="0"/>
           </a:p>
         </p:txBody>
       </p:sp>
@@ -2988,8 +4968,8 @@
         </p:nvSpPr>
         <p:spPr>
           <a:xfrm>
-            <a:off x="822960" y="960120"/>
-            <a:ext cx="10543032" cy="914400"/>
+            <a:off x="822960" y="2240280"/>
+            <a:ext cx="10543032" cy="1828800"/>
           </a:xfrm>
           <a:prstGeom prst="rect">
             <a:avLst/>
@@ -3003,240 +4983,87 @@
           <a:p>
             <a:pPr indent="0" marL="0">
               <a:lnSpc>
-                <a:spcPts val="3300"/>
+                <a:spcPts val="3500"/>
               </a:lnSpc>
               <a:buNone/>
             </a:pPr>
             <a:r>
-              <a:rPr lang="en-US" sz="2700" b="1" dirty="0">
-                <a:solidFill>
-                  <a:srgbClr val="1B2A4A"/>
+              <a:rPr lang="en-US" sz="2500" b="1" dirty="0">
+                <a:solidFill>
+                  <a:srgbClr val="FFFFFF"/>
                 </a:solidFill>
                 <a:latin typeface="Cambria" pitchFamily="34" charset="0"/>
                 <a:ea typeface="Cambria" pitchFamily="34" charset="-122"/>
                 <a:cs typeface="Cambria" pitchFamily="34" charset="-120"/>
               </a:rPr>
-              <a:t>A única prova que importa: funcionar sem nós no meio.</a:t>
-            </a:r>
-            <a:endParaRPr lang="en-US" sz="2700" dirty="0"/>
-          </a:p>
-        </p:txBody>
-      </p:sp>
-      <p:sp>
-        <p:nvSpPr>
-          <p:cNvPr id="4" name="Text 2"/>
-          <p:cNvSpPr/>
-          <p:nvPr/>
-        </p:nvSpPr>
-        <p:spPr>
-          <a:xfrm>
-            <a:off x="822960" y="1920240"/>
-            <a:ext cx="7251192" cy="822960"/>
-          </a:xfrm>
-          <a:prstGeom prst="rect">
-            <a:avLst/>
-          </a:prstGeom>
-          <a:noFill/>
-          <a:ln/>
-        </p:spPr>
-        <p:txBody>
-          <a:bodyPr wrap="square" rtlCol="0" anchor="ctr"/>
-          <a:lstStyle/>
-          <a:p>
-            <a:pPr algn="l" indent="0" marL="0">
+              <a:t>Se o número combinado não apareceu, ou se você simplesmente mudar de ideia, você sai levando tudo. Sem multa.</a:t>
+            </a:r>
+            <a:endParaRPr lang="en-US" sz="2500" dirty="0"/>
+          </a:p>
+        </p:txBody>
+      </p:sp>
+      <p:sp>
+        <p:nvSpPr>
+          <p:cNvPr id="4" name="Shape 2"/>
+          <p:cNvSpPr/>
+          <p:nvPr/>
+        </p:nvSpPr>
+        <p:spPr>
+          <a:xfrm>
+            <a:off x="822960" y="4297680"/>
+            <a:ext cx="2011680" cy="0"/>
+          </a:xfrm>
+          <a:prstGeom prst="line">
+            <a:avLst/>
+          </a:prstGeom>
+          <a:noFill/>
+          <a:ln w="19050">
+            <a:solidFill>
+              <a:srgbClr val="C2A35B"/>
+            </a:solidFill>
+            <a:prstDash val="solid"/>
+          </a:ln>
+        </p:spPr>
+      </p:sp>
+      <p:sp>
+        <p:nvSpPr>
+          <p:cNvPr id="5" name="Text 3"/>
+          <p:cNvSpPr/>
+          <p:nvPr/>
+        </p:nvSpPr>
+        <p:spPr>
+          <a:xfrm>
+            <a:off x="822960" y="4526280"/>
+            <a:ext cx="10543032" cy="822960"/>
+          </a:xfrm>
+          <a:prstGeom prst="rect">
+            <a:avLst/>
+          </a:prstGeom>
+          <a:noFill/>
+          <a:ln/>
+        </p:spPr>
+        <p:txBody>
+          <a:bodyPr wrap="square" rtlCol="0" anchor="ctr"/>
+          <a:lstStyle/>
+          <a:p>
+            <a:pPr indent="0" marL="0">
               <a:lnSpc>
-                <a:spcPts val="2000"/>
+                <a:spcPts val="2300"/>
               </a:lnSpc>
               <a:buNone/>
             </a:pPr>
             <a:r>
-              <a:rPr lang="en-US" sz="1300" dirty="0">
-                <a:solidFill>
-                  <a:srgbClr val="6E6858"/>
-                </a:solidFill>
-                <a:latin typeface="Calibri" pitchFamily="34" charset="0"/>
-                <a:ea typeface="Calibri" pitchFamily="34" charset="-122"/>
-                <a:cs typeface="Calibri" pitchFamily="34" charset="-120"/>
-              </a:rPr>
-              <a:t>A operação acompanhada de perto — e a mão cada vez mais leve, de propósito.</a:t>
-            </a:r>
-            <a:endParaRPr lang="en-US" sz="1300" dirty="0"/>
-          </a:p>
-        </p:txBody>
-      </p:sp>
-      <p:sp>
-        <p:nvSpPr>
-          <p:cNvPr id="5" name="Text 3"/>
-          <p:cNvSpPr/>
-          <p:nvPr/>
-        </p:nvSpPr>
-        <p:spPr>
-          <a:xfrm>
-            <a:off x="822960" y="6400800"/>
-            <a:ext cx="10543032" cy="274320"/>
-          </a:xfrm>
-          <a:prstGeom prst="rect">
-            <a:avLst/>
-          </a:prstGeom>
-          <a:noFill/>
-          <a:ln/>
-        </p:spPr>
-        <p:txBody>
-          <a:bodyPr wrap="square" rtlCol="0" anchor="ctr"/>
-          <a:lstStyle/>
-          <a:p>
-            <a:pPr algn="ctr" indent="0" marL="0">
-              <a:buNone/>
-            </a:pPr>
-            <a:r>
-              <a:rPr lang="en-US" sz="900" spc="100" kern="0" dirty="0">
-                <a:solidFill>
-                  <a:srgbClr val="6E6858"/>
-                </a:solidFill>
-                <a:latin typeface="Calibri" pitchFamily="34" charset="0"/>
-                <a:ea typeface="Calibri" pitchFamily="34" charset="-122"/>
-                <a:cs typeface="Calibri" pitchFamily="34" charset="-120"/>
-              </a:rPr>
-              <a:t>ABBA Consultoria de IA · contato@abbaservices.com.br</a:t>
-            </a:r>
-            <a:endParaRPr lang="en-US" sz="900" dirty="0"/>
-          </a:p>
-        </p:txBody>
-      </p:sp>
-      <p:pic>
-        <p:nvPicPr>
-          <p:cNvPr id="6" name="Image 0" descr="/home/user/abba-ops/08-materiais/assets/fotos/gerenciados--relatorio-mensal.jpg">    </p:cNvPr>
-          <p:cNvPicPr>
-            <a:picLocks noChangeAspect="1"/>
-          </p:cNvPicPr>
-          <p:nvPr/>
-        </p:nvPicPr>
-        <p:blipFill>
-          <a:blip r:embed="rId1"/>
-          <a:stretch>
-            <a:fillRect/>
-          </a:stretch>
-        </p:blipFill>
-        <p:spPr>
-          <a:xfrm>
-            <a:off x="8650773" y="2331720"/>
-            <a:ext cx="2715219" cy="3840480"/>
-          </a:xfrm>
-          <a:prstGeom prst="rect">
-            <a:avLst/>
-          </a:prstGeom>
-        </p:spPr>
-      </p:pic>
-      <p:sp>
-        <p:nvSpPr>
-          <p:cNvPr id="7" name="Text 4"/>
-          <p:cNvSpPr/>
-          <p:nvPr/>
-        </p:nvSpPr>
-        <p:spPr>
-          <a:xfrm>
-            <a:off x="8650773" y="6217920"/>
-            <a:ext cx="2715219" cy="411480"/>
-          </a:xfrm>
-          <a:prstGeom prst="rect">
-            <a:avLst/>
-          </a:prstGeom>
-          <a:noFill/>
-          <a:ln/>
-        </p:spPr>
-        <p:txBody>
-          <a:bodyPr wrap="square" rtlCol="0" anchor="ctr"/>
-          <a:lstStyle/>
-          <a:p>
-            <a:pPr algn="l" indent="0" marL="0">
-              <a:lnSpc>
-                <a:spcPts val="1300"/>
-              </a:lnSpc>
-              <a:buNone/>
-            </a:pPr>
-            <a:r>
-              <a:rPr lang="en-US" sz="950" i="1" dirty="0">
-                <a:solidFill>
-                  <a:srgbClr val="6E6858"/>
-                </a:solidFill>
-                <a:latin typeface="Calibri" pitchFamily="34" charset="0"/>
-                <a:ea typeface="Calibri" pitchFamily="34" charset="-122"/>
-                <a:cs typeface="Calibri" pitchFamily="34" charset="-120"/>
-              </a:rPr>
-              <a:t>Relatório mensal real de operação (empresa preservada).</a:t>
-            </a:r>
-            <a:endParaRPr lang="en-US" sz="950" dirty="0"/>
-          </a:p>
-        </p:txBody>
-      </p:sp>
-      <p:sp>
-        <p:nvSpPr>
-          <p:cNvPr id="8" name="Text 5"/>
-          <p:cNvSpPr/>
-          <p:nvPr/>
-        </p:nvSpPr>
-        <p:spPr>
-          <a:xfrm>
-            <a:off x="822960" y="2606040"/>
-            <a:ext cx="7370613" cy="3200400"/>
-          </a:xfrm>
-          <a:prstGeom prst="rect">
-            <a:avLst/>
-          </a:prstGeom>
-          <a:noFill/>
-          <a:ln/>
-        </p:spPr>
-        <p:txBody>
-          <a:bodyPr wrap="square" rtlCol="0" anchor="ctr"/>
-          <a:lstStyle/>
-          <a:p>
-            <a:pPr algn="l" indent="0" marL="0">
-              <a:lnSpc>
-                <a:spcPts val="2000"/>
-              </a:lnSpc>
-              <a:buNone/>
-            </a:pPr>
-            <a:r>
-              <a:rPr lang="en-US" sz="1300" dirty="0">
-                <a:solidFill>
-                  <a:srgbClr val="33394A"/>
-                </a:solidFill>
-                <a:latin typeface="Calibri" pitchFamily="34" charset="0"/>
-                <a:ea typeface="Calibri" pitchFamily="34" charset="-122"/>
-                <a:cs typeface="Calibri" pitchFamily="34" charset="-120"/>
-              </a:rPr>
-              <a:t>Presença semanal, SLA, relatório mensal de projetado versus realizado e o registro de cada decisão contra o resultado medido.</a:t>
-            </a:r>
-            <a:endParaRPr lang="en-US" sz="1300" dirty="0"/>
-          </a:p>
-          <a:p>
-            <a:pPr algn="l" indent="0" marL="0">
-              <a:lnSpc>
-                <a:spcPts val="2000"/>
-              </a:lnSpc>
-              <a:buNone/>
-            </a:pPr>
-            <a:endParaRPr lang="en-US" sz="1300" dirty="0"/>
-          </a:p>
-          <a:p>
-            <a:pPr algn="l" indent="0" marL="0">
-              <a:lnSpc>
-                <a:spcPts val="2000"/>
-              </a:lnSpc>
-              <a:buNone/>
-            </a:pPr>
-            <a:r>
-              <a:rPr lang="en-US" sz="1300" dirty="0">
-                <a:solidFill>
-                  <a:srgbClr val="33394A"/>
-                </a:solidFill>
-                <a:latin typeface="Calibri" pitchFamily="34" charset="0"/>
-                <a:ea typeface="Calibri" pitchFamily="34" charset="-122"/>
-                <a:cs typeface="Calibri" pitchFamily="34" charset="-120"/>
-              </a:rPr>
-              <a:t>No mês 12, a diretoria não recebe uma impressão: recebe a série do ano inteiro — o que foi prometido, o que foi medido, o que ficou instalado e quem, da sua equipe, opera cada peça.</a:t>
-            </a:r>
-            <a:endParaRPr lang="en-US" sz="1300" dirty="0"/>
+              <a:rPr lang="en-US" sz="1500" i="1" dirty="0">
+                <a:solidFill>
+                  <a:srgbClr val="D8DCE8"/>
+                </a:solidFill>
+                <a:latin typeface="Cambria" pitchFamily="34" charset="0"/>
+                <a:ea typeface="Cambria" pitchFamily="34" charset="-122"/>
+                <a:cs typeface="Cambria" pitchFamily="34" charset="-120"/>
+              </a:rPr>
+              <a:t>Há mais dois portões como este: no mês 6 e no mês 12. Nenhuma fase começa sem a anterior ter provado. Se a gente não bater o número, a gente não segue. É o nosso risco, não o seu.</a:t>
+            </a:r>
+            <a:endParaRPr lang="en-US" sz="1500" dirty="0"/>
           </a:p>
         </p:txBody>
       </p:sp>
@@ -3305,7 +5132,7 @@
                 <a:ea typeface="Calibri" pitchFamily="34" charset="-122"/>
                 <a:cs typeface="Calibri" pitchFamily="34" charset="-120"/>
               </a:rPr>
-              <a:t>E DEPOIS DO ANO?</a:t>
+              <a:t>FASE 2 · A CONSTRUÇÃO · MESES 2 A 6</a:t>
             </a:r>
             <a:endParaRPr lang="en-US" sz="1100" dirty="0"/>
           </a:p>
@@ -3347,7 +5174,7 @@
                 <a:ea typeface="Cambria" pitchFamily="34" charset="-122"/>
                 <a:cs typeface="Cambria" pitchFamily="34" charset="-120"/>
               </a:rPr>
-              <a:t>A relação vira medição anual.</a:t>
+              <a:t>Sistemas em produção. Pessoas formadas. Juntos.</a:t>
             </a:r>
             <a:endParaRPr lang="en-US" sz="2700" dirty="0"/>
           </a:p>
@@ -3389,7 +5216,7 @@
                 <a:ea typeface="Calibri" pitchFamily="34" charset="-122"/>
                 <a:cs typeface="Calibri" pitchFamily="34" charset="-120"/>
               </a:rPr>
-              <a:t>Do segundo ano em diante: operação sob SLA, conselho trimestral e o Exame Anual de IA — a maturidade re-medida e comparada ano contra ano.</a:t>
+              <a:t>Os casos que você aprovou no retrato entram em produção, e a sua equipe é formada em turma própria, em paralelo.</a:t>
             </a:r>
             <a:endParaRPr lang="en-US" sz="1300" dirty="0"/>
           </a:p>
@@ -3442,8 +5269,8 @@
         </p:nvSpPr>
         <p:spPr>
           <a:xfrm>
-            <a:off x="822960" y="2743200"/>
-            <a:ext cx="10543032" cy="1371600"/>
+            <a:off x="822960" y="2651760"/>
+            <a:ext cx="10543032" cy="1051560"/>
           </a:xfrm>
           <a:prstGeom prst="rect">
             <a:avLst/>
@@ -3457,12 +5284,12 @@
           <a:p>
             <a:pPr algn="l" indent="0" marL="0">
               <a:lnSpc>
-                <a:spcPts val="2200"/>
+                <a:spcPts val="1800"/>
               </a:lnSpc>
               <a:buNone/>
             </a:pPr>
             <a:r>
-              <a:rPr lang="en-US" sz="1400" dirty="0">
+              <a:rPr lang="en-US" sz="1250" dirty="0">
                 <a:solidFill>
                   <a:srgbClr val="33394A"/>
                 </a:solidFill>
@@ -3470,45 +5297,70 @@
                 <a:ea typeface="Calibri" pitchFamily="34" charset="-122"/>
                 <a:cs typeface="Calibri" pitchFamily="34" charset="-120"/>
               </a:rPr>
-              <a:t>A série histórica que nasce daí só existe aqui e vale mais a cada ano — e é dela que sai a fila de oportunidades do ano seguinte: melhorias que só aparecem depois que o fluxo novo existe. Expansões entram como mini-ciclos dentro da assinatura, cada um com a mesma regra de sempre: métrica combinada antes, medida depois.</a:t>
-            </a:r>
-            <a:endParaRPr lang="en-US" sz="1400" dirty="0"/>
-          </a:p>
-        </p:txBody>
-      </p:sp>
-      <p:sp>
-        <p:nvSpPr>
-          <p:cNvPr id="7" name="Shape 5"/>
-          <p:cNvSpPr/>
-          <p:nvPr/>
-        </p:nvSpPr>
-        <p:spPr>
-          <a:xfrm>
-            <a:off x="822960" y="4389120"/>
-            <a:ext cx="10543032" cy="0"/>
-          </a:xfrm>
-          <a:prstGeom prst="line">
-            <a:avLst/>
-          </a:prstGeom>
-          <a:noFill/>
-          <a:ln w="9525">
-            <a:solidFill>
-              <a:srgbClr val="E5E0D4"/>
-            </a:solidFill>
-            <a:prstDash val="solid"/>
-          </a:ln>
-        </p:spPr>
-      </p:sp>
-      <p:sp>
-        <p:nvSpPr>
-          <p:cNvPr id="8" name="Text 6"/>
-          <p:cNvSpPr/>
-          <p:nvPr/>
-        </p:nvSpPr>
-        <p:spPr>
-          <a:xfrm>
-            <a:off x="822960" y="4617720"/>
-            <a:ext cx="10543032" cy="822960"/>
+              <a:t>Engenharia de verdade: arquitetura, integrações com os seus sistemas e agentes de IA com pontos de aprovação humana desenhados. Erro caro passa por gente antes de acontecer. E capacitação medida: uma prática por dia, no trabalho real, com fluência medida em 30, 60 e 90 dias. Porque sistema novo com a empresa pensando do jeito antigo não transforma nada.</a:t>
+            </a:r>
+            <a:endParaRPr lang="en-US" sz="1250" dirty="0"/>
+          </a:p>
+        </p:txBody>
+      </p:sp>
+      <p:pic>
+        <p:nvPicPr>
+          <p:cNvPr id="7" name="Image 0" descr="/home/user/abba-ops/08-materiais/assets/fotos/portal--inicio-atual.png">    </p:cNvPr>
+          <p:cNvPicPr>
+            <a:picLocks noChangeAspect="1"/>
+          </p:cNvPicPr>
+          <p:nvPr/>
+        </p:nvPicPr>
+        <p:blipFill>
+          <a:blip r:embed="rId1"/>
+          <a:stretch>
+            <a:fillRect/>
+          </a:stretch>
+        </p:blipFill>
+        <p:spPr>
+          <a:xfrm>
+            <a:off x="822960" y="3611880"/>
+            <a:ext cx="4453128" cy="2514600"/>
+          </a:xfrm>
+          <a:prstGeom prst="rect">
+            <a:avLst/>
+          </a:prstGeom>
+        </p:spPr>
+      </p:pic>
+      <p:pic>
+        <p:nvPicPr>
+          <p:cNvPr id="8" name="Image 1" descr="/home/user/abba-ops/08-materiais/assets/fotos/construcao--relatorio-deployment.jpg">    </p:cNvPr>
+          <p:cNvPicPr>
+            <a:picLocks noChangeAspect="1"/>
+          </p:cNvPicPr>
+          <p:nvPr/>
+        </p:nvPicPr>
+        <p:blipFill>
+          <a:blip r:embed="rId2"/>
+          <a:stretch>
+            <a:fillRect/>
+          </a:stretch>
+        </p:blipFill>
+        <p:spPr>
+          <a:xfrm>
+            <a:off x="5715000" y="3611880"/>
+            <a:ext cx="1773936" cy="2514600"/>
+          </a:xfrm>
+          <a:prstGeom prst="rect">
+            <a:avLst/>
+          </a:prstGeom>
+        </p:spPr>
+      </p:pic>
+      <p:sp>
+        <p:nvSpPr>
+          <p:cNvPr id="9" name="Text 5"/>
+          <p:cNvSpPr/>
+          <p:nvPr/>
+        </p:nvSpPr>
+        <p:spPr>
+          <a:xfrm>
+            <a:off x="822960" y="6163056"/>
+            <a:ext cx="4453128" cy="228600"/>
           </a:xfrm>
           <a:prstGeom prst="rect">
             <a:avLst/>
@@ -3522,22 +5374,64 @@
           <a:p>
             <a:pPr algn="l" indent="0" marL="0">
               <a:lnSpc>
-                <a:spcPts val="2100"/>
+                <a:spcPts val="2000"/>
               </a:lnSpc>
               <a:buNone/>
             </a:pPr>
             <a:r>
-              <a:rPr lang="en-US" sz="1350" i="1" dirty="0">
-                <a:solidFill>
-                  <a:srgbClr val="1B2A4A"/>
-                </a:solidFill>
-                <a:latin typeface="Cambria" pitchFamily="34" charset="0"/>
-                <a:ea typeface="Cambria" pitchFamily="34" charset="-122"/>
-                <a:cs typeface="Cambria" pitchFamily="34" charset="-120"/>
-              </a:rPr>
-              <a:t>Retemos clientes do único jeito que aceitamos: composição de valor, nunca dependência. Tudo o que construímos é seu, o dado é exportável, e a saída é limpa em qualquer aniversário.</a:t>
-            </a:r>
-            <a:endParaRPr lang="en-US" sz="1350" dirty="0"/>
+              <a:rPr lang="en-US" sz="950" i="1" dirty="0">
+                <a:solidFill>
+                  <a:srgbClr val="6E6858"/>
+                </a:solidFill>
+                <a:latin typeface="Calibri" pitchFamily="34" charset="0"/>
+                <a:ea typeface="Calibri" pitchFamily="34" charset="-122"/>
+                <a:cs typeface="Calibri" pitchFamily="34" charset="-120"/>
+              </a:rPr>
+              <a:t>O portal da turma, como o seu time vê hoje.</a:t>
+            </a:r>
+            <a:endParaRPr lang="en-US" sz="950" dirty="0"/>
+          </a:p>
+        </p:txBody>
+      </p:sp>
+      <p:sp>
+        <p:nvSpPr>
+          <p:cNvPr id="10" name="Text 6"/>
+          <p:cNvSpPr/>
+          <p:nvPr/>
+        </p:nvSpPr>
+        <p:spPr>
+          <a:xfrm>
+            <a:off x="5715000" y="6163056"/>
+            <a:ext cx="2926080" cy="228600"/>
+          </a:xfrm>
+          <a:prstGeom prst="rect">
+            <a:avLst/>
+          </a:prstGeom>
+          <a:noFill/>
+          <a:ln/>
+        </p:spPr>
+        <p:txBody>
+          <a:bodyPr wrap="square" rtlCol="0" anchor="ctr"/>
+          <a:lstStyle/>
+          <a:p>
+            <a:pPr algn="l" indent="0" marL="0">
+              <a:lnSpc>
+                <a:spcPts val="2000"/>
+              </a:lnSpc>
+              <a:buNone/>
+            </a:pPr>
+            <a:r>
+              <a:rPr lang="en-US" sz="950" i="1" dirty="0">
+                <a:solidFill>
+                  <a:srgbClr val="6E6858"/>
+                </a:solidFill>
+                <a:latin typeface="Calibri" pitchFamily="34" charset="0"/>
+                <a:ea typeface="Calibri" pitchFamily="34" charset="-122"/>
+                <a:cs typeface="Calibri" pitchFamily="34" charset="-120"/>
+              </a:rPr>
+              <a:t>Relatório de implantação real (empresa preservada).</a:t>
+            </a:r>
+            <a:endParaRPr lang="en-US" sz="950" dirty="0"/>
           </a:p>
         </p:txBody>
       </p:sp>
@@ -3606,7 +5500,7 @@
                 <a:ea typeface="Calibri" pitchFamily="34" charset="-122"/>
                 <a:cs typeface="Calibri" pitchFamily="34" charset="-120"/>
               </a:rPr>
-              <a:t>NO FIM</a:t>
+              <a:t>FASE 3 · A DURABILIDADE · MESES 7 A 12</a:t>
             </a:r>
             <a:endParaRPr lang="en-US" sz="1100" dirty="0"/>
           </a:p>
@@ -3648,7 +5542,7 @@
                 <a:ea typeface="Cambria" pitchFamily="34" charset="-122"/>
                 <a:cs typeface="Cambria" pitchFamily="34" charset="-120"/>
               </a:rPr>
-              <a:t>O que fica com você</a:t>
+              <a:t>A única prova que importa: funcionar sem nós no meio.</a:t>
             </a:r>
             <a:endParaRPr lang="en-US" sz="2700" dirty="0"/>
           </a:p>
@@ -3657,6 +5551,48 @@
       <p:sp>
         <p:nvSpPr>
           <p:cNvPr id="4" name="Text 2"/>
+          <p:cNvSpPr/>
+          <p:nvPr/>
+        </p:nvSpPr>
+        <p:spPr>
+          <a:xfrm>
+            <a:off x="822960" y="1920240"/>
+            <a:ext cx="7251192" cy="822960"/>
+          </a:xfrm>
+          <a:prstGeom prst="rect">
+            <a:avLst/>
+          </a:prstGeom>
+          <a:noFill/>
+          <a:ln/>
+        </p:spPr>
+        <p:txBody>
+          <a:bodyPr wrap="square" rtlCol="0" anchor="ctr"/>
+          <a:lstStyle/>
+          <a:p>
+            <a:pPr algn="l" indent="0" marL="0">
+              <a:lnSpc>
+                <a:spcPts val="2000"/>
+              </a:lnSpc>
+              <a:buNone/>
+            </a:pPr>
+            <a:r>
+              <a:rPr lang="en-US" sz="1300" dirty="0">
+                <a:solidFill>
+                  <a:srgbClr val="6E6858"/>
+                </a:solidFill>
+                <a:latin typeface="Calibri" pitchFamily="34" charset="0"/>
+                <a:ea typeface="Calibri" pitchFamily="34" charset="-122"/>
+                <a:cs typeface="Calibri" pitchFamily="34" charset="-120"/>
+              </a:rPr>
+              <a:t>A operação acompanhada de perto. E a mão cada vez mais leve, de propósito.</a:t>
+            </a:r>
+            <a:endParaRPr lang="en-US" sz="1300" dirty="0"/>
+          </a:p>
+        </p:txBody>
+      </p:sp>
+      <p:sp>
+        <p:nvSpPr>
+          <p:cNvPr id="5" name="Text 3"/>
           <p:cNvSpPr/>
           <p:nvPr/>
         </p:nvSpPr>
@@ -3693,15 +5629,388 @@
           </a:p>
         </p:txBody>
       </p:sp>
-      <p:sp>
-        <p:nvSpPr>
-          <p:cNvPr id="5" name="Shape 3"/>
-          <p:cNvSpPr/>
-          <p:nvPr/>
-        </p:nvSpPr>
-        <p:spPr>
-          <a:xfrm>
-            <a:off x="822960" y="2057400"/>
+      <p:pic>
+        <p:nvPicPr>
+          <p:cNvPr id="6" name="Image 0" descr="/home/user/abba-ops/08-materiais/assets/fotos/gerenciados--relatorio-mensal.jpg">    </p:cNvPr>
+          <p:cNvPicPr>
+            <a:picLocks noChangeAspect="1"/>
+          </p:cNvPicPr>
+          <p:nvPr/>
+        </p:nvPicPr>
+        <p:blipFill>
+          <a:blip r:embed="rId1"/>
+          <a:stretch>
+            <a:fillRect/>
+          </a:stretch>
+        </p:blipFill>
+        <p:spPr>
+          <a:xfrm>
+            <a:off x="8650773" y="2331720"/>
+            <a:ext cx="2715219" cy="3840480"/>
+          </a:xfrm>
+          <a:prstGeom prst="rect">
+            <a:avLst/>
+          </a:prstGeom>
+        </p:spPr>
+      </p:pic>
+      <p:sp>
+        <p:nvSpPr>
+          <p:cNvPr id="7" name="Text 4"/>
+          <p:cNvSpPr/>
+          <p:nvPr/>
+        </p:nvSpPr>
+        <p:spPr>
+          <a:xfrm>
+            <a:off x="8650773" y="6217920"/>
+            <a:ext cx="2715219" cy="411480"/>
+          </a:xfrm>
+          <a:prstGeom prst="rect">
+            <a:avLst/>
+          </a:prstGeom>
+          <a:noFill/>
+          <a:ln/>
+        </p:spPr>
+        <p:txBody>
+          <a:bodyPr wrap="square" rtlCol="0" anchor="ctr"/>
+          <a:lstStyle/>
+          <a:p>
+            <a:pPr algn="l" indent="0" marL="0">
+              <a:lnSpc>
+                <a:spcPts val="1300"/>
+              </a:lnSpc>
+              <a:buNone/>
+            </a:pPr>
+            <a:r>
+              <a:rPr lang="en-US" sz="950" i="1" dirty="0">
+                <a:solidFill>
+                  <a:srgbClr val="6E6858"/>
+                </a:solidFill>
+                <a:latin typeface="Calibri" pitchFamily="34" charset="0"/>
+                <a:ea typeface="Calibri" pitchFamily="34" charset="-122"/>
+                <a:cs typeface="Calibri" pitchFamily="34" charset="-120"/>
+              </a:rPr>
+              <a:t>Relatório mensal real de operação (empresa preservada).</a:t>
+            </a:r>
+            <a:endParaRPr lang="en-US" sz="950" dirty="0"/>
+          </a:p>
+        </p:txBody>
+      </p:sp>
+      <p:sp>
+        <p:nvSpPr>
+          <p:cNvPr id="8" name="Text 5"/>
+          <p:cNvSpPr/>
+          <p:nvPr/>
+        </p:nvSpPr>
+        <p:spPr>
+          <a:xfrm>
+            <a:off x="822960" y="2606040"/>
+            <a:ext cx="7370613" cy="3200400"/>
+          </a:xfrm>
+          <a:prstGeom prst="rect">
+            <a:avLst/>
+          </a:prstGeom>
+          <a:noFill/>
+          <a:ln/>
+        </p:spPr>
+        <p:txBody>
+          <a:bodyPr wrap="square" rtlCol="0" anchor="ctr"/>
+          <a:lstStyle/>
+          <a:p>
+            <a:pPr algn="l" indent="0" marL="0">
+              <a:lnSpc>
+                <a:spcPts val="2000"/>
+              </a:lnSpc>
+              <a:buNone/>
+            </a:pPr>
+            <a:r>
+              <a:rPr lang="en-US" sz="1300" dirty="0">
+                <a:solidFill>
+                  <a:srgbClr val="33394A"/>
+                </a:solidFill>
+                <a:latin typeface="Calibri" pitchFamily="34" charset="0"/>
+                <a:ea typeface="Calibri" pitchFamily="34" charset="-122"/>
+                <a:cs typeface="Calibri" pitchFamily="34" charset="-120"/>
+              </a:rPr>
+              <a:t>Presença semanal, SLA, relatório mensal de projetado versus realizado e o registro de cada decisão contra o resultado medido.</a:t>
+            </a:r>
+            <a:endParaRPr lang="en-US" sz="1300" dirty="0"/>
+          </a:p>
+          <a:p>
+            <a:pPr algn="l" indent="0" marL="0">
+              <a:lnSpc>
+                <a:spcPts val="2000"/>
+              </a:lnSpc>
+              <a:buNone/>
+            </a:pPr>
+            <a:endParaRPr lang="en-US" sz="1300" dirty="0"/>
+          </a:p>
+          <a:p>
+            <a:pPr algn="l" indent="0" marL="0">
+              <a:lnSpc>
+                <a:spcPts val="2000"/>
+              </a:lnSpc>
+              <a:buNone/>
+            </a:pPr>
+            <a:r>
+              <a:rPr lang="en-US" sz="1300" dirty="0">
+                <a:solidFill>
+                  <a:srgbClr val="33394A"/>
+                </a:solidFill>
+                <a:latin typeface="Calibri" pitchFamily="34" charset="0"/>
+                <a:ea typeface="Calibri" pitchFamily="34" charset="-122"/>
+                <a:cs typeface="Calibri" pitchFamily="34" charset="-120"/>
+              </a:rPr>
+              <a:t>No mês 12, a diretoria não recebe uma impressão: recebe a série do ano inteiro. O que foi prometido, o que foi medido, o que ficou instalado e quem, da sua equipe, opera cada peça.</a:t>
+            </a:r>
+            <a:endParaRPr lang="en-US" sz="1300" dirty="0"/>
+          </a:p>
+        </p:txBody>
+      </p:sp>
+    </p:spTree>
+  </p:cSld>
+  <p:clrMapOvr>
+    <a:masterClrMapping/>
+  </p:clrMapOvr>
+</p:sld>
+</file>
+
+<file path=ppt/slides/slide9.xml><?xml version="1.0" encoding="utf-8"?>
+<p:sld xmlns:a="http://schemas.openxmlformats.org/drawingml/2006/main" xmlns:r="http://schemas.openxmlformats.org/officeDocument/2006/relationships" xmlns:p="http://schemas.openxmlformats.org/presentationml/2006/main">
+  <p:cSld name="Slide 9">
+    <p:bg>
+      <p:bgPr>
+        <a:solidFill>
+          <a:srgbClr val="FFFFFF"/>
+        </a:solidFill>
+      </p:bgPr>
+    </p:bg>
+    <p:spTree>
+      <p:nvGrpSpPr>
+        <p:cNvPr id="1" name=""/>
+        <p:cNvGrpSpPr/>
+        <p:nvPr/>
+      </p:nvGrpSpPr>
+      <p:grpSpPr>
+        <a:xfrm>
+          <a:off x="0" y="0"/>
+          <a:ext cx="0" cy="0"/>
+          <a:chOff x="0" y="0"/>
+          <a:chExt cx="0" cy="0"/>
+        </a:xfrm>
+      </p:grpSpPr>
+      <p:sp>
+        <p:nvSpPr>
+          <p:cNvPr id="2" name="Text 0"/>
+          <p:cNvSpPr/>
+          <p:nvPr/>
+        </p:nvSpPr>
+        <p:spPr>
+          <a:xfrm>
+            <a:off x="822960" y="594360"/>
+            <a:ext cx="5486400" cy="292608"/>
+          </a:xfrm>
+          <a:prstGeom prst="rect">
+            <a:avLst/>
+          </a:prstGeom>
+          <a:noFill/>
+          <a:ln/>
+        </p:spPr>
+        <p:txBody>
+          <a:bodyPr wrap="square" rtlCol="0" anchor="ctr"/>
+          <a:lstStyle/>
+          <a:p>
+            <a:pPr algn="l" indent="0" marL="0">
+              <a:buNone/>
+            </a:pPr>
+            <a:r>
+              <a:rPr lang="en-US" sz="1100" b="1" spc="300" kern="0" dirty="0">
+                <a:solidFill>
+                  <a:srgbClr val="C2A35B"/>
+                </a:solidFill>
+                <a:latin typeface="Calibri" pitchFamily="34" charset="0"/>
+                <a:ea typeface="Calibri" pitchFamily="34" charset="-122"/>
+                <a:cs typeface="Calibri" pitchFamily="34" charset="-120"/>
+              </a:rPr>
+              <a:t>E DEPOIS DO ANO?</a:t>
+            </a:r>
+            <a:endParaRPr lang="en-US" sz="1100" dirty="0"/>
+          </a:p>
+        </p:txBody>
+      </p:sp>
+      <p:sp>
+        <p:nvSpPr>
+          <p:cNvPr id="3" name="Text 1"/>
+          <p:cNvSpPr/>
+          <p:nvPr/>
+        </p:nvSpPr>
+        <p:spPr>
+          <a:xfrm>
+            <a:off x="822960" y="960120"/>
+            <a:ext cx="10543032" cy="914400"/>
+          </a:xfrm>
+          <a:prstGeom prst="rect">
+            <a:avLst/>
+          </a:prstGeom>
+          <a:noFill/>
+          <a:ln/>
+        </p:spPr>
+        <p:txBody>
+          <a:bodyPr wrap="square" rtlCol="0" anchor="ctr"/>
+          <a:lstStyle/>
+          <a:p>
+            <a:pPr indent="0" marL="0">
+              <a:lnSpc>
+                <a:spcPts val="3300"/>
+              </a:lnSpc>
+              <a:buNone/>
+            </a:pPr>
+            <a:r>
+              <a:rPr lang="en-US" sz="2700" b="1" dirty="0">
+                <a:solidFill>
+                  <a:srgbClr val="1B2A4A"/>
+                </a:solidFill>
+                <a:latin typeface="Cambria" pitchFamily="34" charset="0"/>
+                <a:ea typeface="Cambria" pitchFamily="34" charset="-122"/>
+                <a:cs typeface="Cambria" pitchFamily="34" charset="-120"/>
+              </a:rPr>
+              <a:t>A relação vira medição anual.</a:t>
+            </a:r>
+            <a:endParaRPr lang="en-US" sz="2700" dirty="0"/>
+          </a:p>
+        </p:txBody>
+      </p:sp>
+      <p:sp>
+        <p:nvSpPr>
+          <p:cNvPr id="4" name="Text 2"/>
+          <p:cNvSpPr/>
+          <p:nvPr/>
+        </p:nvSpPr>
+        <p:spPr>
+          <a:xfrm>
+            <a:off x="822960" y="1920240"/>
+            <a:ext cx="10543032" cy="822960"/>
+          </a:xfrm>
+          <a:prstGeom prst="rect">
+            <a:avLst/>
+          </a:prstGeom>
+          <a:noFill/>
+          <a:ln/>
+        </p:spPr>
+        <p:txBody>
+          <a:bodyPr wrap="square" rtlCol="0" anchor="ctr"/>
+          <a:lstStyle/>
+          <a:p>
+            <a:pPr algn="l" indent="0" marL="0">
+              <a:lnSpc>
+                <a:spcPts val="2000"/>
+              </a:lnSpc>
+              <a:buNone/>
+            </a:pPr>
+            <a:r>
+              <a:rPr lang="en-US" sz="1300" dirty="0">
+                <a:solidFill>
+                  <a:srgbClr val="6E6858"/>
+                </a:solidFill>
+                <a:latin typeface="Calibri" pitchFamily="34" charset="0"/>
+                <a:ea typeface="Calibri" pitchFamily="34" charset="-122"/>
+                <a:cs typeface="Calibri" pitchFamily="34" charset="-120"/>
+              </a:rPr>
+              <a:t>Do segundo ano em diante: operação sob SLA, conselho trimestral e o Exame Anual de IA, a maturidade re-medida e comparada ano contra ano.</a:t>
+            </a:r>
+            <a:endParaRPr lang="en-US" sz="1300" dirty="0"/>
+          </a:p>
+        </p:txBody>
+      </p:sp>
+      <p:sp>
+        <p:nvSpPr>
+          <p:cNvPr id="5" name="Text 3"/>
+          <p:cNvSpPr/>
+          <p:nvPr/>
+        </p:nvSpPr>
+        <p:spPr>
+          <a:xfrm>
+            <a:off x="822960" y="6400800"/>
+            <a:ext cx="10543032" cy="274320"/>
+          </a:xfrm>
+          <a:prstGeom prst="rect">
+            <a:avLst/>
+          </a:prstGeom>
+          <a:noFill/>
+          <a:ln/>
+        </p:spPr>
+        <p:txBody>
+          <a:bodyPr wrap="square" rtlCol="0" anchor="ctr"/>
+          <a:lstStyle/>
+          <a:p>
+            <a:pPr algn="ctr" indent="0" marL="0">
+              <a:buNone/>
+            </a:pPr>
+            <a:r>
+              <a:rPr lang="en-US" sz="900" spc="100" kern="0" dirty="0">
+                <a:solidFill>
+                  <a:srgbClr val="6E6858"/>
+                </a:solidFill>
+                <a:latin typeface="Calibri" pitchFamily="34" charset="0"/>
+                <a:ea typeface="Calibri" pitchFamily="34" charset="-122"/>
+                <a:cs typeface="Calibri" pitchFamily="34" charset="-120"/>
+              </a:rPr>
+              <a:t>ABBA Consultoria de IA · contato@abbaservices.com.br</a:t>
+            </a:r>
+            <a:endParaRPr lang="en-US" sz="900" dirty="0"/>
+          </a:p>
+        </p:txBody>
+      </p:sp>
+      <p:sp>
+        <p:nvSpPr>
+          <p:cNvPr id="6" name="Text 4"/>
+          <p:cNvSpPr/>
+          <p:nvPr/>
+        </p:nvSpPr>
+        <p:spPr>
+          <a:xfrm>
+            <a:off x="822960" y="2743200"/>
+            <a:ext cx="10543032" cy="1371600"/>
+          </a:xfrm>
+          <a:prstGeom prst="rect">
+            <a:avLst/>
+          </a:prstGeom>
+          <a:noFill/>
+          <a:ln/>
+        </p:spPr>
+        <p:txBody>
+          <a:bodyPr wrap="square" rtlCol="0" anchor="ctr"/>
+          <a:lstStyle/>
+          <a:p>
+            <a:pPr algn="l" indent="0" marL="0">
+              <a:lnSpc>
+                <a:spcPts val="2200"/>
+              </a:lnSpc>
+              <a:buNone/>
+            </a:pPr>
+            <a:r>
+              <a:rPr lang="en-US" sz="1400" dirty="0">
+                <a:solidFill>
+                  <a:srgbClr val="33394A"/>
+                </a:solidFill>
+                <a:latin typeface="Calibri" pitchFamily="34" charset="0"/>
+                <a:ea typeface="Calibri" pitchFamily="34" charset="-122"/>
+                <a:cs typeface="Calibri" pitchFamily="34" charset="-120"/>
+              </a:rPr>
+              <a:t>A série histórica que nasce daí só existe aqui e vale mais a cada ano. É dela que sai a fila de oportunidades do ano seguinte: melhorias que só aparecem depois que o fluxo novo existe. Expansões entram como mini-ciclos dentro da assinatura, cada um com a mesma regra de sempre: métrica combinada antes, medida depois.</a:t>
+            </a:r>
+            <a:endParaRPr lang="en-US" sz="1400" dirty="0"/>
+          </a:p>
+        </p:txBody>
+      </p:sp>
+      <p:sp>
+        <p:nvSpPr>
+          <p:cNvPr id="7" name="Shape 5"/>
+          <p:cNvSpPr/>
+          <p:nvPr/>
+        </p:nvSpPr>
+        <p:spPr>
+          <a:xfrm>
+            <a:off x="822960" y="4389120"/>
             <a:ext cx="10543032" cy="0"/>
           </a:xfrm>
           <a:prstGeom prst="line">
@@ -3718,53 +6027,14 @@
       </p:sp>
       <p:sp>
         <p:nvSpPr>
-          <p:cNvPr id="6" name="Text 4"/>
-          <p:cNvSpPr/>
-          <p:nvPr/>
-        </p:nvSpPr>
-        <p:spPr>
-          <a:xfrm>
-            <a:off x="822960" y="2167128"/>
-            <a:ext cx="2377440" cy="292608"/>
-          </a:xfrm>
-          <a:prstGeom prst="rect">
-            <a:avLst/>
-          </a:prstGeom>
-          <a:noFill/>
-          <a:ln/>
-        </p:spPr>
-        <p:txBody>
-          <a:bodyPr wrap="square" rtlCol="0" anchor="ctr"/>
-          <a:lstStyle/>
-          <a:p>
-            <a:pPr algn="l" indent="0" marL="0">
-              <a:buNone/>
-            </a:pPr>
-            <a:r>
-              <a:rPr lang="en-US" sz="1050" b="1" spc="300" kern="0" dirty="0">
-                <a:solidFill>
-                  <a:srgbClr val="C2A35B"/>
-                </a:solidFill>
-                <a:latin typeface="Calibri" pitchFamily="34" charset="0"/>
-                <a:ea typeface="Calibri" pitchFamily="34" charset="-122"/>
-                <a:cs typeface="Calibri" pitchFamily="34" charset="-120"/>
-              </a:rPr>
-              <a:t>OS SISTEMAS</a:t>
-            </a:r>
-            <a:endParaRPr lang="en-US" sz="1050" dirty="0"/>
-          </a:p>
-        </p:txBody>
-      </p:sp>
-      <p:sp>
-        <p:nvSpPr>
-          <p:cNvPr id="7" name="Text 5"/>
-          <p:cNvSpPr/>
-          <p:nvPr/>
-        </p:nvSpPr>
-        <p:spPr>
-          <a:xfrm>
-            <a:off x="3383280" y="2148840"/>
-            <a:ext cx="7982712" cy="777240"/>
+          <p:cNvPr id="8" name="Text 6"/>
+          <p:cNvSpPr/>
+          <p:nvPr/>
+        </p:nvSpPr>
+        <p:spPr>
+          <a:xfrm>
+            <a:off x="822960" y="4617720"/>
+            <a:ext cx="10543032" cy="822960"/>
           </a:xfrm>
           <a:prstGeom prst="rect">
             <a:avLst/>
@@ -3778,363 +6048,12 @@
           <a:p>
             <a:pPr algn="l" indent="0" marL="0">
               <a:lnSpc>
-                <a:spcPts val="1900"/>
+                <a:spcPts val="2100"/>
               </a:lnSpc>
               <a:buNone/>
             </a:pPr>
             <a:r>
-              <a:rPr lang="en-US" sz="1300" dirty="0">
-                <a:solidFill>
-                  <a:srgbClr val="33394A"/>
-                </a:solidFill>
-                <a:latin typeface="Calibri" pitchFamily="34" charset="0"/>
-                <a:ea typeface="Calibri" pitchFamily="34" charset="-122"/>
-                <a:cs typeface="Calibri" pitchFamily="34" charset="-120"/>
-              </a:rPr>
-              <a:t>em produção, documentados, com aprovação humana nos pontos certos — propriedade sua.</a:t>
-            </a:r>
-            <a:endParaRPr lang="en-US" sz="1300" dirty="0"/>
-          </a:p>
-        </p:txBody>
-      </p:sp>
-      <p:sp>
-        <p:nvSpPr>
-          <p:cNvPr id="8" name="Shape 6"/>
-          <p:cNvSpPr/>
-          <p:nvPr/>
-        </p:nvSpPr>
-        <p:spPr>
-          <a:xfrm>
-            <a:off x="822960" y="3044952"/>
-            <a:ext cx="10543032" cy="0"/>
-          </a:xfrm>
-          <a:prstGeom prst="line">
-            <a:avLst/>
-          </a:prstGeom>
-          <a:noFill/>
-          <a:ln w="9525">
-            <a:solidFill>
-              <a:srgbClr val="E5E0D4"/>
-            </a:solidFill>
-            <a:prstDash val="solid"/>
-          </a:ln>
-        </p:spPr>
-      </p:sp>
-      <p:sp>
-        <p:nvSpPr>
-          <p:cNvPr id="9" name="Text 7"/>
-          <p:cNvSpPr/>
-          <p:nvPr/>
-        </p:nvSpPr>
-        <p:spPr>
-          <a:xfrm>
-            <a:off x="822960" y="3154680"/>
-            <a:ext cx="2377440" cy="292608"/>
-          </a:xfrm>
-          <a:prstGeom prst="rect">
-            <a:avLst/>
-          </a:prstGeom>
-          <a:noFill/>
-          <a:ln/>
-        </p:spPr>
-        <p:txBody>
-          <a:bodyPr wrap="square" rtlCol="0" anchor="ctr"/>
-          <a:lstStyle/>
-          <a:p>
-            <a:pPr algn="l" indent="0" marL="0">
-              <a:buNone/>
-            </a:pPr>
-            <a:r>
-              <a:rPr lang="en-US" sz="1050" b="1" spc="300" kern="0" dirty="0">
-                <a:solidFill>
-                  <a:srgbClr val="C2A35B"/>
-                </a:solidFill>
-                <a:latin typeface="Calibri" pitchFamily="34" charset="0"/>
-                <a:ea typeface="Calibri" pitchFamily="34" charset="-122"/>
-                <a:cs typeface="Calibri" pitchFamily="34" charset="-120"/>
-              </a:rPr>
-              <a:t>AS PESSOAS</a:t>
-            </a:r>
-            <a:endParaRPr lang="en-US" sz="1050" dirty="0"/>
-          </a:p>
-        </p:txBody>
-      </p:sp>
-      <p:sp>
-        <p:nvSpPr>
-          <p:cNvPr id="10" name="Text 8"/>
-          <p:cNvSpPr/>
-          <p:nvPr/>
-        </p:nvSpPr>
-        <p:spPr>
-          <a:xfrm>
-            <a:off x="3383280" y="3136392"/>
-            <a:ext cx="7982712" cy="777240"/>
-          </a:xfrm>
-          <a:prstGeom prst="rect">
-            <a:avLst/>
-          </a:prstGeom>
-          <a:noFill/>
-          <a:ln/>
-        </p:spPr>
-        <p:txBody>
-          <a:bodyPr wrap="square" rtlCol="0" anchor="ctr"/>
-          <a:lstStyle/>
-          <a:p>
-            <a:pPr algn="l" indent="0" marL="0">
-              <a:lnSpc>
-                <a:spcPts val="1900"/>
-              </a:lnSpc>
-              <a:buNone/>
-            </a:pPr>
-            <a:r>
-              <a:rPr lang="en-US" sz="1300" dirty="0">
-                <a:solidFill>
-                  <a:srgbClr val="33394A"/>
-                </a:solidFill>
-                <a:latin typeface="Calibri" pitchFamily="34" charset="0"/>
-                <a:ea typeface="Calibri" pitchFamily="34" charset="-122"/>
-                <a:cs typeface="Calibri" pitchFamily="34" charset="-120"/>
-              </a:rPr>
-              <a:t>formadas em turma própria, com fluência medida — e um dono interno para cada peça.</a:t>
-            </a:r>
-            <a:endParaRPr lang="en-US" sz="1300" dirty="0"/>
-          </a:p>
-        </p:txBody>
-      </p:sp>
-      <p:sp>
-        <p:nvSpPr>
-          <p:cNvPr id="11" name="Shape 9"/>
-          <p:cNvSpPr/>
-          <p:nvPr/>
-        </p:nvSpPr>
-        <p:spPr>
-          <a:xfrm>
-            <a:off x="822960" y="4032504"/>
-            <a:ext cx="10543032" cy="0"/>
-          </a:xfrm>
-          <a:prstGeom prst="line">
-            <a:avLst/>
-          </a:prstGeom>
-          <a:noFill/>
-          <a:ln w="9525">
-            <a:solidFill>
-              <a:srgbClr val="E5E0D4"/>
-            </a:solidFill>
-            <a:prstDash val="solid"/>
-          </a:ln>
-        </p:spPr>
-      </p:sp>
-      <p:sp>
-        <p:nvSpPr>
-          <p:cNvPr id="12" name="Text 10"/>
-          <p:cNvSpPr/>
-          <p:nvPr/>
-        </p:nvSpPr>
-        <p:spPr>
-          <a:xfrm>
-            <a:off x="822960" y="4142232"/>
-            <a:ext cx="2377440" cy="292608"/>
-          </a:xfrm>
-          <a:prstGeom prst="rect">
-            <a:avLst/>
-          </a:prstGeom>
-          <a:noFill/>
-          <a:ln/>
-        </p:spPr>
-        <p:txBody>
-          <a:bodyPr wrap="square" rtlCol="0" anchor="ctr"/>
-          <a:lstStyle/>
-          <a:p>
-            <a:pPr algn="l" indent="0" marL="0">
-              <a:buNone/>
-            </a:pPr>
-            <a:r>
-              <a:rPr lang="en-US" sz="1050" b="1" spc="300" kern="0" dirty="0">
-                <a:solidFill>
-                  <a:srgbClr val="C2A35B"/>
-                </a:solidFill>
-                <a:latin typeface="Calibri" pitchFamily="34" charset="0"/>
-                <a:ea typeface="Calibri" pitchFamily="34" charset="-122"/>
-                <a:cs typeface="Calibri" pitchFamily="34" charset="-120"/>
-              </a:rPr>
-              <a:t>O REGISTRO</a:t>
-            </a:r>
-            <a:endParaRPr lang="en-US" sz="1050" dirty="0"/>
-          </a:p>
-        </p:txBody>
-      </p:sp>
-      <p:sp>
-        <p:nvSpPr>
-          <p:cNvPr id="13" name="Text 11"/>
-          <p:cNvSpPr/>
-          <p:nvPr/>
-        </p:nvSpPr>
-        <p:spPr>
-          <a:xfrm>
-            <a:off x="3383280" y="4123944"/>
-            <a:ext cx="7982712" cy="777240"/>
-          </a:xfrm>
-          <a:prstGeom prst="rect">
-            <a:avLst/>
-          </a:prstGeom>
-          <a:noFill/>
-          <a:ln/>
-        </p:spPr>
-        <p:txBody>
-          <a:bodyPr wrap="square" rtlCol="0" anchor="ctr"/>
-          <a:lstStyle/>
-          <a:p>
-            <a:pPr algn="l" indent="0" marL="0">
-              <a:lnSpc>
-                <a:spcPts val="1900"/>
-              </a:lnSpc>
-              <a:buNone/>
-            </a:pPr>
-            <a:r>
-              <a:rPr lang="en-US" sz="1300" dirty="0">
-                <a:solidFill>
-                  <a:srgbClr val="33394A"/>
-                </a:solidFill>
-                <a:latin typeface="Calibri" pitchFamily="34" charset="0"/>
-                <a:ea typeface="Calibri" pitchFamily="34" charset="-122"/>
-                <a:cs typeface="Calibri" pitchFamily="34" charset="-120"/>
-              </a:rPr>
-              <a:t>cada decisão com o número combinado antes e o resultado medido depois, assinado por gente sua.</a:t>
-            </a:r>
-            <a:endParaRPr lang="en-US" sz="1300" dirty="0"/>
-          </a:p>
-        </p:txBody>
-      </p:sp>
-      <p:sp>
-        <p:nvSpPr>
-          <p:cNvPr id="14" name="Shape 12"/>
-          <p:cNvSpPr/>
-          <p:nvPr/>
-        </p:nvSpPr>
-        <p:spPr>
-          <a:xfrm>
-            <a:off x="822960" y="5020056"/>
-            <a:ext cx="10543032" cy="0"/>
-          </a:xfrm>
-          <a:prstGeom prst="line">
-            <a:avLst/>
-          </a:prstGeom>
-          <a:noFill/>
-          <a:ln w="9525">
-            <a:solidFill>
-              <a:srgbClr val="E5E0D4"/>
-            </a:solidFill>
-            <a:prstDash val="solid"/>
-          </a:ln>
-        </p:spPr>
-      </p:sp>
-      <p:sp>
-        <p:nvSpPr>
-          <p:cNvPr id="15" name="Text 13"/>
-          <p:cNvSpPr/>
-          <p:nvPr/>
-        </p:nvSpPr>
-        <p:spPr>
-          <a:xfrm>
-            <a:off x="822960" y="5129784"/>
-            <a:ext cx="2377440" cy="292608"/>
-          </a:xfrm>
-          <a:prstGeom prst="rect">
-            <a:avLst/>
-          </a:prstGeom>
-          <a:noFill/>
-          <a:ln/>
-        </p:spPr>
-        <p:txBody>
-          <a:bodyPr wrap="square" rtlCol="0" anchor="ctr"/>
-          <a:lstStyle/>
-          <a:p>
-            <a:pPr algn="l" indent="0" marL="0">
-              <a:buNone/>
-            </a:pPr>
-            <a:r>
-              <a:rPr lang="en-US" sz="1050" b="1" spc="300" kern="0" dirty="0">
-                <a:solidFill>
-                  <a:srgbClr val="C2A35B"/>
-                </a:solidFill>
-                <a:latin typeface="Calibri" pitchFamily="34" charset="0"/>
-                <a:ea typeface="Calibri" pitchFamily="34" charset="-122"/>
-                <a:cs typeface="Calibri" pitchFamily="34" charset="-120"/>
-              </a:rPr>
-              <a:t>A PROVA</a:t>
-            </a:r>
-            <a:endParaRPr lang="en-US" sz="1050" dirty="0"/>
-          </a:p>
-        </p:txBody>
-      </p:sp>
-      <p:sp>
-        <p:nvSpPr>
-          <p:cNvPr id="16" name="Text 14"/>
-          <p:cNvSpPr/>
-          <p:nvPr/>
-        </p:nvSpPr>
-        <p:spPr>
-          <a:xfrm>
-            <a:off x="3383280" y="5111496"/>
-            <a:ext cx="7982712" cy="777240"/>
-          </a:xfrm>
-          <a:prstGeom prst="rect">
-            <a:avLst/>
-          </a:prstGeom>
-          <a:noFill/>
-          <a:ln/>
-        </p:spPr>
-        <p:txBody>
-          <a:bodyPr wrap="square" rtlCol="0" anchor="ctr"/>
-          <a:lstStyle/>
-          <a:p>
-            <a:pPr algn="l" indent="0" marL="0">
-              <a:lnSpc>
-                <a:spcPts val="1900"/>
-              </a:lnSpc>
-              <a:buNone/>
-            </a:pPr>
-            <a:r>
-              <a:rPr lang="en-US" sz="1300" dirty="0">
-                <a:solidFill>
-                  <a:srgbClr val="33394A"/>
-                </a:solidFill>
-                <a:latin typeface="Calibri" pitchFamily="34" charset="0"/>
-                <a:ea typeface="Calibri" pitchFamily="34" charset="-122"/>
-                <a:cs typeface="Calibri" pitchFamily="34" charset="-120"/>
-              </a:rPr>
-              <a:t>não a nossa palavra: a série de projetado versus realizado do ano inteiro, pronta para a diretoria.</a:t>
-            </a:r>
-            <a:endParaRPr lang="en-US" sz="1300" dirty="0"/>
-          </a:p>
-        </p:txBody>
-      </p:sp>
-      <p:sp>
-        <p:nvSpPr>
-          <p:cNvPr id="17" name="Text 15"/>
-          <p:cNvSpPr/>
-          <p:nvPr/>
-        </p:nvSpPr>
-        <p:spPr>
-          <a:xfrm>
-            <a:off x="822960" y="6035040"/>
-            <a:ext cx="10543032" cy="457200"/>
-          </a:xfrm>
-          <a:prstGeom prst="rect">
-            <a:avLst/>
-          </a:prstGeom>
-          <a:noFill/>
-          <a:ln/>
-        </p:spPr>
-        <p:txBody>
-          <a:bodyPr wrap="square" rtlCol="0" anchor="ctr"/>
-          <a:lstStyle/>
-          <a:p>
-            <a:pPr algn="ctr" indent="0" marL="0">
-              <a:buNone/>
-            </a:pPr>
-            <a:r>
-              <a:rPr lang="en-US" sz="1500" b="1" dirty="0">
+              <a:rPr lang="en-US" sz="1350" i="1" dirty="0">
                 <a:solidFill>
                   <a:srgbClr val="1B2A4A"/>
                 </a:solidFill>
@@ -4142,9 +6061,9 @@
                 <a:ea typeface="Cambria" pitchFamily="34" charset="-122"/>
                 <a:cs typeface="Cambria" pitchFamily="34" charset="-120"/>
               </a:rPr>
-              <a:t>O próximo passo não custa nada: o Mapa de Vazamento da sua operação.</a:t>
-            </a:r>
-            <a:endParaRPr lang="en-US" sz="1500" dirty="0"/>
+              <a:t>Retemos clientes do único jeito que aceitamos: composição de valor, nunca dependência. Tudo o que construímos é seu, o dado é exportável, e a saída é limpa em qualquer aniversário.</a:t>
+            </a:r>
+            <a:endParaRPr lang="en-US" sz="1350" dirty="0"/>
           </a:p>
         </p:txBody>
       </p:sp>

--- a/08-materiais/modelos/deck-programa.pptx
+++ b/08-materiais/modelos/deck-programa.pptx
@@ -3248,7 +3248,7 @@
                 <a:ea typeface="Calibri" pitchFamily="34" charset="-122"/>
                 <a:cs typeface="Calibri" pitchFamily="34" charset="-120"/>
               </a:rPr>
-              <a:t>O caso escolhido construído com os seus dados e posto em uso real, contra a métrica combinada por escrito na primeira semana. É a primeira parede da obra: é ela que paga a fundação do resto.</a:t>
+              <a:t>O caso escolhido construído com os seus dados e posto em uso real, contra a métrica combinada por escrito na primeira semana. É a prova antes do investimento: a diretoria decide GO ou NO-GO com números na mesa.</a:t>
             </a:r>
             <a:endParaRPr lang="en-US" sz="1000" dirty="0"/>
           </a:p>
@@ -4968,8 +4968,8 @@
         </p:nvSpPr>
         <p:spPr>
           <a:xfrm>
-            <a:off x="822960" y="2240280"/>
-            <a:ext cx="10543032" cy="1828800"/>
+            <a:off x="822960" y="2148840"/>
+            <a:ext cx="10543032" cy="2011680"/>
           </a:xfrm>
           <a:prstGeom prst="rect">
             <a:avLst/>
@@ -4983,12 +4983,12 @@
           <a:p>
             <a:pPr indent="0" marL="0">
               <a:lnSpc>
-                <a:spcPts val="3500"/>
+                <a:spcPts val="3000"/>
               </a:lnSpc>
               <a:buNone/>
             </a:pPr>
             <a:r>
-              <a:rPr lang="en-US" sz="2500" b="1" dirty="0">
+              <a:rPr lang="en-US" sz="2100" b="1" dirty="0">
                 <a:solidFill>
                   <a:srgbClr val="FFFFFF"/>
                 </a:solidFill>
@@ -4996,9 +4996,9 @@
                 <a:ea typeface="Cambria" pitchFamily="34" charset="-122"/>
                 <a:cs typeface="Cambria" pitchFamily="34" charset="-120"/>
               </a:rPr>
-              <a:t>Se o número combinado não apareceu, ou se você simplesmente mudar de ideia, você sai levando tudo. Sem multa.</a:t>
-            </a:r>
-            <a:endParaRPr lang="en-US" sz="2500" dirty="0"/>
+              <a:t>Ao término da fase 1, a decisão de continuar é integralmente sua. Se o resultado medido não confirmar o critério combinado, o Programa se encerra ali: sem multa, e com os entregáveis em suas mãos.</a:t>
+            </a:r>
+            <a:endParaRPr lang="en-US" sz="2100" dirty="0"/>
           </a:p>
         </p:txBody>
       </p:sp>
@@ -5061,7 +5061,7 @@
                 <a:ea typeface="Cambria" pitchFamily="34" charset="-122"/>
                 <a:cs typeface="Cambria" pitchFamily="34" charset="-120"/>
               </a:rPr>
-              <a:t>Há mais dois portões como este: no mês 6 e no mês 12. Nenhuma fase começa sem a anterior ter provado. Se a gente não bater o número, a gente não segue. É o nosso risco, não o seu.</a:t>
+              <a:t>Os portões se repetem no mês seis e no mês doze. Nenhuma fase se inicia sem que a anterior tenha comprovado o seu resultado: o risco de continuidade é nosso, não seu.</a:t>
             </a:r>
             <a:endParaRPr lang="en-US" sz="1500" dirty="0"/>
           </a:p>
